--- a/Midterm Poster.pptx
+++ b/Midterm Poster.pptx
@@ -316,6 +316,395 @@
     </p:ext>
   </p:extLst>
 </p:presentation>
+</file>
+
+<file path=ppt/revisionInfo.xml><?xml version="1.0" encoding="utf-8"?>
+<p1510:revInfo xmlns:a="http://schemas.openxmlformats.org/drawingml/2006/main" xmlns:r="http://schemas.openxmlformats.org/officeDocument/2006/relationships" xmlns:p1510="http://schemas.microsoft.com/office/powerpoint/2015/10/main">
+  <p1510:revLst>
+    <p1510:client id="{42EC36BE-339E-4D58-940C-98D9C495AE88}" v="20" dt="2025-05-02T12:58:35.042"/>
+  </p1510:revLst>
+</p1510:revInfo>
+</file>
+
+<file path=ppt/changesInfos/changesInfo1.xml><?xml version="1.0" encoding="utf-8"?>
+<pc:chgInfo xmlns:a="http://schemas.openxmlformats.org/drawingml/2006/main" xmlns:r="http://schemas.openxmlformats.org/officeDocument/2006/relationships" xmlns:ac="http://schemas.microsoft.com/office/drawing/2013/main/command" xmlns:pc="http://schemas.microsoft.com/office/powerpoint/2013/main/command">
+  <pc:docChgLst>
+    <pc:chgData name="Valkov,Momchil M.I." userId="602502f2-f02b-4dbc-b214-10936151aa62" providerId="ADAL" clId="{42EC36BE-339E-4D58-940C-98D9C495AE88}"/>
+    <pc:docChg chg="undo custSel modSld">
+      <pc:chgData name="Valkov,Momchil M.I." userId="602502f2-f02b-4dbc-b214-10936151aa62" providerId="ADAL" clId="{42EC36BE-339E-4D58-940C-98D9C495AE88}" dt="2025-05-02T13:30:12.749" v="738" actId="1035"/>
+      <pc:docMkLst>
+        <pc:docMk/>
+      </pc:docMkLst>
+      <pc:sldChg chg="addSp delSp modSp mod">
+        <pc:chgData name="Valkov,Momchil M.I." userId="602502f2-f02b-4dbc-b214-10936151aa62" providerId="ADAL" clId="{42EC36BE-339E-4D58-940C-98D9C495AE88}" dt="2025-05-02T13:30:12.749" v="738" actId="1035"/>
+        <pc:sldMkLst>
+          <pc:docMk/>
+          <pc:sldMk cId="0" sldId="256"/>
+        </pc:sldMkLst>
+        <pc:spChg chg="mod">
+          <ac:chgData name="Valkov,Momchil M.I." userId="602502f2-f02b-4dbc-b214-10936151aa62" providerId="ADAL" clId="{42EC36BE-339E-4D58-940C-98D9C495AE88}" dt="2025-05-02T13:14:15.948" v="631" actId="208"/>
+          <ac:spMkLst>
+            <pc:docMk/>
+            <pc:sldMk cId="0" sldId="256"/>
+            <ac:spMk id="4" creationId="{6CBEDE31-2D0B-9D25-69D9-E4251B194AA1}"/>
+          </ac:spMkLst>
+        </pc:spChg>
+        <pc:spChg chg="mod">
+          <ac:chgData name="Valkov,Momchil M.I." userId="602502f2-f02b-4dbc-b214-10936151aa62" providerId="ADAL" clId="{42EC36BE-339E-4D58-940C-98D9C495AE88}" dt="2025-05-02T13:13:57.471" v="630" actId="14100"/>
+          <ac:spMkLst>
+            <pc:docMk/>
+            <pc:sldMk cId="0" sldId="256"/>
+            <ac:spMk id="5" creationId="{E26F6558-9FE2-0179-2E67-3A99E254B4DF}"/>
+          </ac:spMkLst>
+        </pc:spChg>
+        <pc:spChg chg="mod">
+          <ac:chgData name="Valkov,Momchil M.I." userId="602502f2-f02b-4dbc-b214-10936151aa62" providerId="ADAL" clId="{42EC36BE-339E-4D58-940C-98D9C495AE88}" dt="2025-05-02T13:14:59.102" v="643" actId="1076"/>
+          <ac:spMkLst>
+            <pc:docMk/>
+            <pc:sldMk cId="0" sldId="256"/>
+            <ac:spMk id="8" creationId="{141CFB88-E5BA-7FB9-A606-74536D781C89}"/>
+          </ac:spMkLst>
+        </pc:spChg>
+        <pc:spChg chg="add mod">
+          <ac:chgData name="Valkov,Momchil M.I." userId="602502f2-f02b-4dbc-b214-10936151aa62" providerId="ADAL" clId="{42EC36BE-339E-4D58-940C-98D9C495AE88}" dt="2025-05-02T13:04:15.869" v="604" actId="1076"/>
+          <ac:spMkLst>
+            <pc:docMk/>
+            <pc:sldMk cId="0" sldId="256"/>
+            <ac:spMk id="12" creationId="{9274D218-F250-80BA-F82C-9DFA58F58865}"/>
+          </ac:spMkLst>
+        </pc:spChg>
+        <pc:spChg chg="add mod">
+          <ac:chgData name="Valkov,Momchil M.I." userId="602502f2-f02b-4dbc-b214-10936151aa62" providerId="ADAL" clId="{42EC36BE-339E-4D58-940C-98D9C495AE88}" dt="2025-05-02T12:15:02.116" v="25" actId="20577"/>
+          <ac:spMkLst>
+            <pc:docMk/>
+            <pc:sldMk cId="0" sldId="256"/>
+            <ac:spMk id="14" creationId="{214C92B6-D62E-2A32-1A8A-8259B92B86FA}"/>
+          </ac:spMkLst>
+        </pc:spChg>
+        <pc:spChg chg="add mod">
+          <ac:chgData name="Valkov,Momchil M.I." userId="602502f2-f02b-4dbc-b214-10936151aa62" providerId="ADAL" clId="{42EC36BE-339E-4D58-940C-98D9C495AE88}" dt="2025-05-02T12:24:38.428" v="35" actId="20577"/>
+          <ac:spMkLst>
+            <pc:docMk/>
+            <pc:sldMk cId="0" sldId="256"/>
+            <ac:spMk id="15" creationId="{99DC2732-2AF5-04A8-AED5-89FAEA8AFA4B}"/>
+          </ac:spMkLst>
+        </pc:spChg>
+        <pc:spChg chg="add del mod">
+          <ac:chgData name="Valkov,Momchil M.I." userId="602502f2-f02b-4dbc-b214-10936151aa62" providerId="ADAL" clId="{42EC36BE-339E-4D58-940C-98D9C495AE88}" dt="2025-05-02T12:23:46.150" v="29" actId="478"/>
+          <ac:spMkLst>
+            <pc:docMk/>
+            <pc:sldMk cId="0" sldId="256"/>
+            <ac:spMk id="16" creationId="{E7C10012-FD76-25FD-A87A-E33D70181800}"/>
+          </ac:spMkLst>
+        </pc:spChg>
+        <pc:spChg chg="add mod">
+          <ac:chgData name="Valkov,Momchil M.I." userId="602502f2-f02b-4dbc-b214-10936151aa62" providerId="ADAL" clId="{42EC36BE-339E-4D58-940C-98D9C495AE88}" dt="2025-05-02T12:26:52.565" v="71" actId="1076"/>
+          <ac:spMkLst>
+            <pc:docMk/>
+            <pc:sldMk cId="0" sldId="256"/>
+            <ac:spMk id="19" creationId="{38BBFE08-5ECF-AD0B-0E03-A532BA3D18DC}"/>
+          </ac:spMkLst>
+        </pc:spChg>
+        <pc:spChg chg="add mod">
+          <ac:chgData name="Valkov,Momchil M.I." userId="602502f2-f02b-4dbc-b214-10936151aa62" providerId="ADAL" clId="{42EC36BE-339E-4D58-940C-98D9C495AE88}" dt="2025-05-02T12:38:47.345" v="156" actId="1076"/>
+          <ac:spMkLst>
+            <pc:docMk/>
+            <pc:sldMk cId="0" sldId="256"/>
+            <ac:spMk id="20" creationId="{253F3187-A0B8-0ED4-4CA6-85A14A664292}"/>
+          </ac:spMkLst>
+        </pc:spChg>
+        <pc:spChg chg="add mod">
+          <ac:chgData name="Valkov,Momchil M.I." userId="602502f2-f02b-4dbc-b214-10936151aa62" providerId="ADAL" clId="{42EC36BE-339E-4D58-940C-98D9C495AE88}" dt="2025-05-02T12:36:25.173" v="155" actId="20577"/>
+          <ac:spMkLst>
+            <pc:docMk/>
+            <pc:sldMk cId="0" sldId="256"/>
+            <ac:spMk id="23" creationId="{C2EFE3FD-EB95-9A34-0AAD-5BB9C8B98E30}"/>
+          </ac:spMkLst>
+        </pc:spChg>
+        <pc:spChg chg="add del">
+          <ac:chgData name="Valkov,Momchil M.I." userId="602502f2-f02b-4dbc-b214-10936151aa62" providerId="ADAL" clId="{42EC36BE-339E-4D58-940C-98D9C495AE88}" dt="2025-05-02T12:44:49.412" v="161" actId="478"/>
+          <ac:spMkLst>
+            <pc:docMk/>
+            <pc:sldMk cId="0" sldId="256"/>
+            <ac:spMk id="25" creationId="{468333FD-50DF-A7EE-2D93-E7E5B192B508}"/>
+          </ac:spMkLst>
+        </pc:spChg>
+        <pc:spChg chg="add mod">
+          <ac:chgData name="Valkov,Momchil M.I." userId="602502f2-f02b-4dbc-b214-10936151aa62" providerId="ADAL" clId="{42EC36BE-339E-4D58-940C-98D9C495AE88}" dt="2025-05-02T13:29:06.530" v="697" actId="20577"/>
+          <ac:spMkLst>
+            <pc:docMk/>
+            <pc:sldMk cId="0" sldId="256"/>
+            <ac:spMk id="26" creationId="{600FA42D-449D-A01C-CBBF-CE5E60742541}"/>
+          </ac:spMkLst>
+        </pc:spChg>
+        <pc:spChg chg="add mod">
+          <ac:chgData name="Valkov,Momchil M.I." userId="602502f2-f02b-4dbc-b214-10936151aa62" providerId="ADAL" clId="{42EC36BE-339E-4D58-940C-98D9C495AE88}" dt="2025-05-02T12:48:07.660" v="229" actId="1076"/>
+          <ac:spMkLst>
+            <pc:docMk/>
+            <pc:sldMk cId="0" sldId="256"/>
+            <ac:spMk id="28" creationId="{F81A34E9-B890-D910-1D99-FACB9A93398C}"/>
+          </ac:spMkLst>
+        </pc:spChg>
+        <pc:spChg chg="mod">
+          <ac:chgData name="Valkov,Momchil M.I." userId="602502f2-f02b-4dbc-b214-10936151aa62" providerId="ADAL" clId="{42EC36BE-339E-4D58-940C-98D9C495AE88}" dt="2025-05-02T13:13:49.406" v="628" actId="1037"/>
+          <ac:spMkLst>
+            <pc:docMk/>
+            <pc:sldMk cId="0" sldId="256"/>
+            <ac:spMk id="30" creationId="{00000000-0000-0000-0000-000000000000}"/>
+          </ac:spMkLst>
+        </pc:spChg>
+        <pc:spChg chg="del">
+          <ac:chgData name="Valkov,Momchil M.I." userId="602502f2-f02b-4dbc-b214-10936151aa62" providerId="ADAL" clId="{42EC36BE-339E-4D58-940C-98D9C495AE88}" dt="2025-05-02T12:14:45.597" v="16" actId="478"/>
+          <ac:spMkLst>
+            <pc:docMk/>
+            <pc:sldMk cId="0" sldId="256"/>
+            <ac:spMk id="35" creationId="{00000000-0000-0000-0000-000000000000}"/>
+          </ac:spMkLst>
+        </pc:spChg>
+        <pc:spChg chg="del">
+          <ac:chgData name="Valkov,Momchil M.I." userId="602502f2-f02b-4dbc-b214-10936151aa62" providerId="ADAL" clId="{42EC36BE-339E-4D58-940C-98D9C495AE88}" dt="2025-05-02T12:14:42.020" v="13" actId="478"/>
+          <ac:spMkLst>
+            <pc:docMk/>
+            <pc:sldMk cId="0" sldId="256"/>
+            <ac:spMk id="37" creationId="{00000000-0000-0000-0000-000000000000}"/>
+          </ac:spMkLst>
+        </pc:spChg>
+        <pc:spChg chg="del">
+          <ac:chgData name="Valkov,Momchil M.I." userId="602502f2-f02b-4dbc-b214-10936151aa62" providerId="ADAL" clId="{42EC36BE-339E-4D58-940C-98D9C495AE88}" dt="2025-05-02T12:14:43.117" v="14" actId="478"/>
+          <ac:spMkLst>
+            <pc:docMk/>
+            <pc:sldMk cId="0" sldId="256"/>
+            <ac:spMk id="38" creationId="{00000000-0000-0000-0000-000000000000}"/>
+          </ac:spMkLst>
+        </pc:spChg>
+        <pc:spChg chg="add mod">
+          <ac:chgData name="Valkov,Momchil M.I." userId="602502f2-f02b-4dbc-b214-10936151aa62" providerId="ADAL" clId="{42EC36BE-339E-4D58-940C-98D9C495AE88}" dt="2025-05-02T13:29:20.899" v="700" actId="1076"/>
+          <ac:spMkLst>
+            <pc:docMk/>
+            <pc:sldMk cId="0" sldId="256"/>
+            <ac:spMk id="41" creationId="{ECDA0DFE-FEB1-9F96-611B-EB218EB00045}"/>
+          </ac:spMkLst>
+        </pc:spChg>
+        <pc:spChg chg="del">
+          <ac:chgData name="Valkov,Momchil M.I." userId="602502f2-f02b-4dbc-b214-10936151aa62" providerId="ADAL" clId="{42EC36BE-339E-4D58-940C-98D9C495AE88}" dt="2025-05-02T12:35:51.910" v="134" actId="478"/>
+          <ac:spMkLst>
+            <pc:docMk/>
+            <pc:sldMk cId="0" sldId="256"/>
+            <ac:spMk id="42" creationId="{00000000-0000-0000-0000-000000000000}"/>
+          </ac:spMkLst>
+        </pc:spChg>
+        <pc:spChg chg="del">
+          <ac:chgData name="Valkov,Momchil M.I." userId="602502f2-f02b-4dbc-b214-10936151aa62" providerId="ADAL" clId="{42EC36BE-339E-4D58-940C-98D9C495AE88}" dt="2025-05-02T12:35:53.205" v="135" actId="478"/>
+          <ac:spMkLst>
+            <pc:docMk/>
+            <pc:sldMk cId="0" sldId="256"/>
+            <ac:spMk id="43" creationId="{00000000-0000-0000-0000-000000000000}"/>
+          </ac:spMkLst>
+        </pc:spChg>
+        <pc:spChg chg="del">
+          <ac:chgData name="Valkov,Momchil M.I." userId="602502f2-f02b-4dbc-b214-10936151aa62" providerId="ADAL" clId="{42EC36BE-339E-4D58-940C-98D9C495AE88}" dt="2025-05-02T12:35:54.119" v="136" actId="478"/>
+          <ac:spMkLst>
+            <pc:docMk/>
+            <pc:sldMk cId="0" sldId="256"/>
+            <ac:spMk id="44" creationId="{00000000-0000-0000-0000-000000000000}"/>
+          </ac:spMkLst>
+        </pc:spChg>
+        <pc:spChg chg="del">
+          <ac:chgData name="Valkov,Momchil M.I." userId="602502f2-f02b-4dbc-b214-10936151aa62" providerId="ADAL" clId="{42EC36BE-339E-4D58-940C-98D9C495AE88}" dt="2025-05-02T12:35:50.754" v="133" actId="478"/>
+          <ac:spMkLst>
+            <pc:docMk/>
+            <pc:sldMk cId="0" sldId="256"/>
+            <ac:spMk id="45" creationId="{00000000-0000-0000-0000-000000000000}"/>
+          </ac:spMkLst>
+        </pc:spChg>
+        <pc:spChg chg="add mod">
+          <ac:chgData name="Valkov,Momchil M.I." userId="602502f2-f02b-4dbc-b214-10936151aa62" providerId="ADAL" clId="{42EC36BE-339E-4D58-940C-98D9C495AE88}" dt="2025-05-02T13:29:25.236" v="701" actId="1076"/>
+          <ac:spMkLst>
+            <pc:docMk/>
+            <pc:sldMk cId="0" sldId="256"/>
+            <ac:spMk id="46" creationId="{B36E198C-4DCC-1D46-8341-9C922A2072FF}"/>
+          </ac:spMkLst>
+        </pc:spChg>
+        <pc:spChg chg="del">
+          <ac:chgData name="Valkov,Momchil M.I." userId="602502f2-f02b-4dbc-b214-10936151aa62" providerId="ADAL" clId="{42EC36BE-339E-4D58-940C-98D9C495AE88}" dt="2025-05-02T12:35:58.556" v="140" actId="478"/>
+          <ac:spMkLst>
+            <pc:docMk/>
+            <pc:sldMk cId="0" sldId="256"/>
+            <ac:spMk id="48" creationId="{00000000-0000-0000-0000-000000000000}"/>
+          </ac:spMkLst>
+        </pc:spChg>
+        <pc:spChg chg="del mod">
+          <ac:chgData name="Valkov,Momchil M.I." userId="602502f2-f02b-4dbc-b214-10936151aa62" providerId="ADAL" clId="{42EC36BE-339E-4D58-940C-98D9C495AE88}" dt="2025-05-02T12:35:57.343" v="139" actId="478"/>
+          <ac:spMkLst>
+            <pc:docMk/>
+            <pc:sldMk cId="0" sldId="256"/>
+            <ac:spMk id="49" creationId="{00000000-0000-0000-0000-000000000000}"/>
+          </ac:spMkLst>
+        </pc:spChg>
+        <pc:spChg chg="add mod">
+          <ac:chgData name="Valkov,Momchil M.I." userId="602502f2-f02b-4dbc-b214-10936151aa62" providerId="ADAL" clId="{42EC36BE-339E-4D58-940C-98D9C495AE88}" dt="2025-05-02T13:29:42.227" v="728" actId="20577"/>
+          <ac:spMkLst>
+            <pc:docMk/>
+            <pc:sldMk cId="0" sldId="256"/>
+            <ac:spMk id="56" creationId="{142349D3-B9F4-7985-DB2C-B40B39522241}"/>
+          </ac:spMkLst>
+        </pc:spChg>
+        <pc:spChg chg="add mod">
+          <ac:chgData name="Valkov,Momchil M.I." userId="602502f2-f02b-4dbc-b214-10936151aa62" providerId="ADAL" clId="{42EC36BE-339E-4D58-940C-98D9C495AE88}" dt="2025-05-02T13:29:34.655" v="727" actId="1036"/>
+          <ac:spMkLst>
+            <pc:docMk/>
+            <pc:sldMk cId="0" sldId="256"/>
+            <ac:spMk id="59" creationId="{763FF30B-E924-0DC6-2D87-B86CF27FFC86}"/>
+          </ac:spMkLst>
+        </pc:spChg>
+        <pc:spChg chg="add mod">
+          <ac:chgData name="Valkov,Momchil M.I." userId="602502f2-f02b-4dbc-b214-10936151aa62" providerId="ADAL" clId="{42EC36BE-339E-4D58-940C-98D9C495AE88}" dt="2025-05-02T13:29:34.655" v="727" actId="1036"/>
+          <ac:spMkLst>
+            <pc:docMk/>
+            <pc:sldMk cId="0" sldId="256"/>
+            <ac:spMk id="62" creationId="{12348A5F-7C97-89B0-9764-CBBCDF92DC26}"/>
+          </ac:spMkLst>
+        </pc:spChg>
+        <pc:graphicFrameChg chg="add del mod modGraphic">
+          <ac:chgData name="Valkov,Momchil M.I." userId="602502f2-f02b-4dbc-b214-10936151aa62" providerId="ADAL" clId="{42EC36BE-339E-4D58-940C-98D9C495AE88}" dt="2025-05-02T12:49:15.834" v="237" actId="478"/>
+          <ac:graphicFrameMkLst>
+            <pc:docMk/>
+            <pc:sldMk cId="0" sldId="256"/>
+            <ac:graphicFrameMk id="27" creationId="{2A9E6775-A8F6-FE4F-1FA2-5739842D3CA6}"/>
+          </ac:graphicFrameMkLst>
+        </pc:graphicFrameChg>
+        <pc:picChg chg="mod">
+          <ac:chgData name="Valkov,Momchil M.I." userId="602502f2-f02b-4dbc-b214-10936151aa62" providerId="ADAL" clId="{42EC36BE-339E-4D58-940C-98D9C495AE88}" dt="2025-05-02T13:13:52.792" v="629" actId="14100"/>
+          <ac:picMkLst>
+            <pc:docMk/>
+            <pc:sldMk cId="0" sldId="256"/>
+            <ac:picMk id="3" creationId="{AD0BF1AD-BA21-844C-457E-992E0C900A4C}"/>
+          </ac:picMkLst>
+        </pc:picChg>
+        <pc:picChg chg="add mod">
+          <ac:chgData name="Valkov,Momchil M.I." userId="602502f2-f02b-4dbc-b214-10936151aa62" providerId="ADAL" clId="{42EC36BE-339E-4D58-940C-98D9C495AE88}" dt="2025-05-02T13:30:12.749" v="738" actId="1035"/>
+          <ac:picMkLst>
+            <pc:docMk/>
+            <pc:sldMk cId="0" sldId="256"/>
+            <ac:picMk id="10" creationId="{CC044F1B-C1DB-4989-F7DF-0C0CC3462C9E}"/>
+          </ac:picMkLst>
+        </pc:picChg>
+        <pc:picChg chg="mod">
+          <ac:chgData name="Valkov,Momchil M.I." userId="602502f2-f02b-4dbc-b214-10936151aa62" providerId="ADAL" clId="{42EC36BE-339E-4D58-940C-98D9C495AE88}" dt="2025-05-02T13:06:24.604" v="624" actId="1076"/>
+          <ac:picMkLst>
+            <pc:docMk/>
+            <pc:sldMk cId="0" sldId="256"/>
+            <ac:picMk id="13" creationId="{B02CE036-D6F8-13AC-6CB1-65275643AD2A}"/>
+          </ac:picMkLst>
+        </pc:picChg>
+        <pc:picChg chg="add mod">
+          <ac:chgData name="Valkov,Momchil M.I." userId="602502f2-f02b-4dbc-b214-10936151aa62" providerId="ADAL" clId="{42EC36BE-339E-4D58-940C-98D9C495AE88}" dt="2025-05-02T12:26:47.502" v="70" actId="14100"/>
+          <ac:picMkLst>
+            <pc:docMk/>
+            <pc:sldMk cId="0" sldId="256"/>
+            <ac:picMk id="18" creationId="{4892B5CC-72E4-63D2-508A-12F7E708E9A1}"/>
+          </ac:picMkLst>
+        </pc:picChg>
+        <pc:picChg chg="add mod modCrop">
+          <ac:chgData name="Valkov,Momchil M.I." userId="602502f2-f02b-4dbc-b214-10936151aa62" providerId="ADAL" clId="{42EC36BE-339E-4D58-940C-98D9C495AE88}" dt="2025-05-02T12:47:33.805" v="175" actId="1076"/>
+          <ac:picMkLst>
+            <pc:docMk/>
+            <pc:sldMk cId="0" sldId="256"/>
+            <ac:picMk id="22" creationId="{CB6A163E-A7D2-6943-FB69-E1E2D3117855}"/>
+          </ac:picMkLst>
+        </pc:picChg>
+        <pc:picChg chg="del">
+          <ac:chgData name="Valkov,Momchil M.I." userId="602502f2-f02b-4dbc-b214-10936151aa62" providerId="ADAL" clId="{42EC36BE-339E-4D58-940C-98D9C495AE88}" dt="2025-05-02T12:35:49.693" v="132" actId="478"/>
+          <ac:picMkLst>
+            <pc:docMk/>
+            <pc:sldMk cId="0" sldId="256"/>
+            <ac:picMk id="31" creationId="{00000000-0000-0000-0000-000000000000}"/>
+          </ac:picMkLst>
+        </pc:picChg>
+        <pc:picChg chg="del">
+          <ac:chgData name="Valkov,Momchil M.I." userId="602502f2-f02b-4dbc-b214-10936151aa62" providerId="ADAL" clId="{42EC36BE-339E-4D58-940C-98D9C495AE88}" dt="2025-05-02T12:35:55.231" v="137" actId="478"/>
+          <ac:picMkLst>
+            <pc:docMk/>
+            <pc:sldMk cId="0" sldId="256"/>
+            <ac:picMk id="32" creationId="{00000000-0000-0000-0000-000000000000}"/>
+          </ac:picMkLst>
+        </pc:picChg>
+        <pc:picChg chg="add del mod">
+          <ac:chgData name="Valkov,Momchil M.I." userId="602502f2-f02b-4dbc-b214-10936151aa62" providerId="ADAL" clId="{42EC36BE-339E-4D58-940C-98D9C495AE88}" dt="2025-05-02T12:49:05.605" v="232" actId="478"/>
+          <ac:picMkLst>
+            <pc:docMk/>
+            <pc:sldMk cId="0" sldId="256"/>
+            <ac:picMk id="36" creationId="{C94E8C51-BC26-9F35-4880-E4064D418387}"/>
+          </ac:picMkLst>
+        </pc:picChg>
+        <pc:picChg chg="add mod">
+          <ac:chgData name="Valkov,Momchil M.I." userId="602502f2-f02b-4dbc-b214-10936151aa62" providerId="ADAL" clId="{42EC36BE-339E-4D58-940C-98D9C495AE88}" dt="2025-05-02T13:29:16.031" v="699" actId="1076"/>
+          <ac:picMkLst>
+            <pc:docMk/>
+            <pc:sldMk cId="0" sldId="256"/>
+            <ac:picMk id="40" creationId="{A232F2E5-A2A1-E725-05B9-A2A95ADAAFF7}"/>
+          </ac:picMkLst>
+        </pc:picChg>
+        <pc:picChg chg="del">
+          <ac:chgData name="Valkov,Momchil M.I." userId="602502f2-f02b-4dbc-b214-10936151aa62" providerId="ADAL" clId="{42EC36BE-339E-4D58-940C-98D9C495AE88}" dt="2025-05-02T12:14:47.149" v="17" actId="478"/>
+          <ac:picMkLst>
+            <pc:docMk/>
+            <pc:sldMk cId="0" sldId="256"/>
+            <ac:picMk id="47" creationId="{00000000-0000-0000-0000-000000000000}"/>
+          </ac:picMkLst>
+        </pc:picChg>
+        <pc:picChg chg="del">
+          <ac:chgData name="Valkov,Momchil M.I." userId="602502f2-f02b-4dbc-b214-10936151aa62" providerId="ADAL" clId="{42EC36BE-339E-4D58-940C-98D9C495AE88}" dt="2025-05-02T13:03:54.506" v="598" actId="478"/>
+          <ac:picMkLst>
+            <pc:docMk/>
+            <pc:sldMk cId="0" sldId="256"/>
+            <ac:picMk id="51" creationId="{00000000-0000-0000-0000-000000000000}"/>
+          </ac:picMkLst>
+        </pc:picChg>
+        <pc:picChg chg="del">
+          <ac:chgData name="Valkov,Momchil M.I." userId="602502f2-f02b-4dbc-b214-10936151aa62" providerId="ADAL" clId="{42EC36BE-339E-4D58-940C-98D9C495AE88}" dt="2025-05-02T12:14:43.969" v="15" actId="478"/>
+          <ac:picMkLst>
+            <pc:docMk/>
+            <pc:sldMk cId="0" sldId="256"/>
+            <ac:picMk id="52" creationId="{00000000-0000-0000-0000-000000000000}"/>
+          </ac:picMkLst>
+        </pc:picChg>
+        <pc:picChg chg="del">
+          <ac:chgData name="Valkov,Momchil M.I." userId="602502f2-f02b-4dbc-b214-10936151aa62" providerId="ADAL" clId="{42EC36BE-339E-4D58-940C-98D9C495AE88}" dt="2025-05-02T12:14:48.327" v="18" actId="478"/>
+          <ac:picMkLst>
+            <pc:docMk/>
+            <pc:sldMk cId="0" sldId="256"/>
+            <ac:picMk id="53" creationId="{00000000-0000-0000-0000-000000000000}"/>
+          </ac:picMkLst>
+        </pc:picChg>
+        <pc:picChg chg="add mod modCrop">
+          <ac:chgData name="Valkov,Momchil M.I." userId="602502f2-f02b-4dbc-b214-10936151aa62" providerId="ADAL" clId="{42EC36BE-339E-4D58-940C-98D9C495AE88}" dt="2025-05-02T13:29:34.655" v="727" actId="1036"/>
+          <ac:picMkLst>
+            <pc:docMk/>
+            <pc:sldMk cId="0" sldId="256"/>
+            <ac:picMk id="55" creationId="{26D05F86-6F83-14BC-503C-37659D204FC4}"/>
+          </ac:picMkLst>
+        </pc:picChg>
+        <pc:picChg chg="add mod">
+          <ac:chgData name="Valkov,Momchil M.I." userId="602502f2-f02b-4dbc-b214-10936151aa62" providerId="ADAL" clId="{42EC36BE-339E-4D58-940C-98D9C495AE88}" dt="2025-05-02T13:29:34.655" v="727" actId="1036"/>
+          <ac:picMkLst>
+            <pc:docMk/>
+            <pc:sldMk cId="0" sldId="256"/>
+            <ac:picMk id="58" creationId="{C93FF166-A822-5D86-FD0B-049B468A0FF4}"/>
+          </ac:picMkLst>
+        </pc:picChg>
+        <pc:picChg chg="add mod">
+          <ac:chgData name="Valkov,Momchil M.I." userId="602502f2-f02b-4dbc-b214-10936151aa62" providerId="ADAL" clId="{42EC36BE-339E-4D58-940C-98D9C495AE88}" dt="2025-05-02T13:29:34.655" v="727" actId="1036"/>
+          <ac:picMkLst>
+            <pc:docMk/>
+            <pc:sldMk cId="0" sldId="256"/>
+            <ac:picMk id="61" creationId="{0E1B1BC3-A607-E363-55AA-3CBD875F9334}"/>
+          </ac:picMkLst>
+        </pc:picChg>
+      </pc:sldChg>
+    </pc:docChg>
+  </pc:docChgLst>
+</pc:chgInfo>
 </file>
 
 <file path=ppt/notesMasters/notesMaster1.xml><?xml version="1.0" encoding="utf-8"?>
@@ -1501,7 +1890,7 @@
           </a:solidFill>
           <a:ln w="12700" cap="flat">
             <a:solidFill>
-              <a:schemeClr val="accent1"/>
+              <a:srgbClr val="6851EB"/>
             </a:solidFill>
             <a:prstDash val="solid"/>
             <a:miter lim="800000"/>
@@ -1568,7 +1957,7 @@
         </p:nvSpPr>
         <p:spPr>
           <a:xfrm>
-            <a:off x="274440" y="796028"/>
+            <a:off x="333434" y="796028"/>
             <a:ext cx="20017205" cy="1446550"/>
           </a:xfrm>
           <a:prstGeom prst="rect">
@@ -1619,60 +2008,6 @@
           </a:p>
         </p:txBody>
       </p:sp>
-      <p:pic>
-        <p:nvPicPr>
-          <p:cNvPr id="31" name="Picture 33" descr="Picture 33"/>
-          <p:cNvPicPr>
-            <a:picLocks noChangeAspect="1"/>
-          </p:cNvPicPr>
-          <p:nvPr/>
-        </p:nvPicPr>
-        <p:blipFill>
-          <a:blip r:embed="rId2"/>
-          <a:stretch>
-            <a:fillRect/>
-          </a:stretch>
-        </p:blipFill>
-        <p:spPr>
-          <a:xfrm>
-            <a:off x="23683676" y="3524768"/>
-            <a:ext cx="7550306" cy="6685451"/>
-          </a:xfrm>
-          <a:prstGeom prst="rect">
-            <a:avLst/>
-          </a:prstGeom>
-          <a:ln w="12700">
-            <a:miter lim="400000"/>
-          </a:ln>
-        </p:spPr>
-      </p:pic>
-      <p:pic>
-        <p:nvPicPr>
-          <p:cNvPr id="32" name="Graphic 36" descr="Graphic 36"/>
-          <p:cNvPicPr>
-            <a:picLocks noChangeAspect="1"/>
-          </p:cNvPicPr>
-          <p:nvPr/>
-        </p:nvPicPr>
-        <p:blipFill>
-          <a:blip r:embed="rId3"/>
-          <a:stretch>
-            <a:fillRect/>
-          </a:stretch>
-        </p:blipFill>
-        <p:spPr>
-          <a:xfrm>
-            <a:off x="24227637" y="14459308"/>
-            <a:ext cx="6426465" cy="2454553"/>
-          </a:xfrm>
-          <a:prstGeom prst="rect">
-            <a:avLst/>
-          </a:prstGeom>
-          <a:ln w="12700">
-            <a:miter lim="400000"/>
-          </a:ln>
-        </p:spPr>
-      </p:pic>
       <p:sp>
         <p:nvSpPr>
           <p:cNvPr id="33" name="TextBox 38"/>
@@ -1783,557 +2118,6 @@
       </p:sp>
       <p:sp>
         <p:nvSpPr>
-          <p:cNvPr id="35" name="TextBox 41"/>
-          <p:cNvSpPr txBox="1"/>
-          <p:nvPr/>
-        </p:nvSpPr>
-        <p:spPr>
-          <a:xfrm>
-            <a:off x="11854541" y="9929327"/>
-            <a:ext cx="9130938" cy="1843576"/>
-          </a:xfrm>
-          <a:prstGeom prst="rect">
-            <a:avLst/>
-          </a:prstGeom>
-          <a:ln w="12700">
-            <a:miter lim="400000"/>
-          </a:ln>
-          <a:extLst>
-            <a:ext uri="{C572A759-6A51-4108-AA02-DFA0A04FC94B}">
-              <ma14:wrappingTextBoxFlag xmlns="" xmlns:m="http://schemas.openxmlformats.org/officeDocument/2006/math" xmlns:a14="http://schemas.microsoft.com/office/drawing/2010/main" xmlns:ma14="http://schemas.microsoft.com/office/mac/drawingml/2011/main" val="1"/>
-            </a:ext>
-          </a:extLst>
-        </p:spPr>
-        <p:txBody>
-          <a:bodyPr lIns="45719" rIns="45719">
-            <a:spAutoFit/>
-          </a:bodyPr>
-          <a:lstStyle>
-            <a:lvl1pPr>
-              <a:lnSpc>
-                <a:spcPct val="120000"/>
-              </a:lnSpc>
-              <a:defRPr sz="2100">
-                <a:solidFill>
-                  <a:srgbClr val="344854"/>
-                </a:solidFill>
-                <a:latin typeface="Arial"/>
-                <a:ea typeface="Arial"/>
-                <a:cs typeface="Arial"/>
-                <a:sym typeface="Arial"/>
-              </a:defRPr>
-            </a:lvl1pPr>
-          </a:lstStyle>
-          <a:p>
-            <a:r>
-              <a:t>This section is an example of a paragraph.  When creating sections, regardless of whether you're putting in text or images, always try to align to the edges of the yellow guidelines. This poster canvas is broken into 3 columns, and aligning to the edges will make it much easier for viewers to differentiate sections and read information.</a:t>
-            </a:r>
-          </a:p>
-        </p:txBody>
-      </p:sp>
-      <p:sp>
-        <p:nvSpPr>
-          <p:cNvPr id="37" name="TextBox 43"/>
-          <p:cNvSpPr txBox="1"/>
-          <p:nvPr/>
-        </p:nvSpPr>
-        <p:spPr>
-          <a:xfrm>
-            <a:off x="11880670" y="3580560"/>
-            <a:ext cx="9064533" cy="572615"/>
-          </a:xfrm>
-          <a:prstGeom prst="rect">
-            <a:avLst/>
-          </a:prstGeom>
-          <a:ln w="12700">
-            <a:miter lim="400000"/>
-          </a:ln>
-          <a:extLst>
-            <a:ext uri="{C572A759-6A51-4108-AA02-DFA0A04FC94B}">
-              <ma14:wrappingTextBoxFlag xmlns="" xmlns:m="http://schemas.openxmlformats.org/officeDocument/2006/math" xmlns:a14="http://schemas.microsoft.com/office/drawing/2010/main" xmlns:ma14="http://schemas.microsoft.com/office/mac/drawingml/2011/main" val="1"/>
-            </a:ext>
-          </a:extLst>
-        </p:spPr>
-        <p:txBody>
-          <a:bodyPr lIns="45719" rIns="45719">
-            <a:spAutoFit/>
-          </a:bodyPr>
-          <a:lstStyle>
-            <a:lvl1pPr>
-              <a:defRPr sz="3400">
-                <a:latin typeface="Arial"/>
-                <a:ea typeface="Arial"/>
-                <a:cs typeface="Arial"/>
-                <a:sym typeface="Arial"/>
-              </a:defRPr>
-            </a:lvl1pPr>
-          </a:lstStyle>
-          <a:p>
-            <a:r>
-              <a:t>Section header in 34pt font</a:t>
-            </a:r>
-          </a:p>
-        </p:txBody>
-      </p:sp>
-      <p:sp>
-        <p:nvSpPr>
-          <p:cNvPr id="38" name="TextBox 44"/>
-          <p:cNvSpPr txBox="1"/>
-          <p:nvPr/>
-        </p:nvSpPr>
-        <p:spPr>
-          <a:xfrm>
-            <a:off x="11880670" y="4326744"/>
-            <a:ext cx="9064533" cy="387515"/>
-          </a:xfrm>
-          <a:prstGeom prst="rect">
-            <a:avLst/>
-          </a:prstGeom>
-          <a:ln w="12700">
-            <a:miter lim="400000"/>
-          </a:ln>
-          <a:extLst>
-            <a:ext uri="{C572A759-6A51-4108-AA02-DFA0A04FC94B}">
-              <ma14:wrappingTextBoxFlag xmlns="" xmlns:m="http://schemas.openxmlformats.org/officeDocument/2006/math" xmlns:a14="http://schemas.microsoft.com/office/drawing/2010/main" xmlns:ma14="http://schemas.microsoft.com/office/mac/drawingml/2011/main" val="1"/>
-            </a:ext>
-          </a:extLst>
-        </p:spPr>
-        <p:txBody>
-          <a:bodyPr lIns="45719" rIns="45719">
-            <a:spAutoFit/>
-          </a:bodyPr>
-          <a:lstStyle>
-            <a:lvl1pPr>
-              <a:defRPr sz="2100">
-                <a:latin typeface="Arial"/>
-                <a:ea typeface="Arial"/>
-                <a:cs typeface="Arial"/>
-                <a:sym typeface="Arial"/>
-              </a:defRPr>
-            </a:lvl1pPr>
-          </a:lstStyle>
-          <a:p>
-            <a:r>
-              <a:t>Optional section descriptor in 21pt font</a:t>
-            </a:r>
-          </a:p>
-        </p:txBody>
-      </p:sp>
-      <p:sp>
-        <p:nvSpPr>
-          <p:cNvPr id="42" name="TextBox 51"/>
-          <p:cNvSpPr txBox="1"/>
-          <p:nvPr/>
-        </p:nvSpPr>
-        <p:spPr>
-          <a:xfrm>
-            <a:off x="22928580" y="11375924"/>
-            <a:ext cx="9029701" cy="572614"/>
-          </a:xfrm>
-          <a:prstGeom prst="rect">
-            <a:avLst/>
-          </a:prstGeom>
-          <a:ln w="12700">
-            <a:miter lim="400000"/>
-          </a:ln>
-          <a:extLst>
-            <a:ext uri="{C572A759-6A51-4108-AA02-DFA0A04FC94B}">
-              <ma14:wrappingTextBoxFlag xmlns="" xmlns:m="http://schemas.openxmlformats.org/officeDocument/2006/math" xmlns:a14="http://schemas.microsoft.com/office/drawing/2010/main" xmlns:ma14="http://schemas.microsoft.com/office/mac/drawingml/2011/main" val="1"/>
-            </a:ext>
-          </a:extLst>
-        </p:spPr>
-        <p:txBody>
-          <a:bodyPr lIns="45719" rIns="45719">
-            <a:spAutoFit/>
-          </a:bodyPr>
-          <a:lstStyle>
-            <a:lvl1pPr>
-              <a:defRPr sz="3400">
-                <a:latin typeface="Arial"/>
-                <a:ea typeface="Arial"/>
-                <a:cs typeface="Arial"/>
-                <a:sym typeface="Arial"/>
-              </a:defRPr>
-            </a:lvl1pPr>
-          </a:lstStyle>
-          <a:p>
-            <a:r>
-              <a:t>Section header in 34pt font</a:t>
-            </a:r>
-          </a:p>
-        </p:txBody>
-      </p:sp>
-      <p:sp>
-        <p:nvSpPr>
-          <p:cNvPr id="43" name="TextBox 52"/>
-          <p:cNvSpPr txBox="1"/>
-          <p:nvPr/>
-        </p:nvSpPr>
-        <p:spPr>
-          <a:xfrm>
-            <a:off x="22928580" y="12122105"/>
-            <a:ext cx="9029701" cy="387516"/>
-          </a:xfrm>
-          <a:prstGeom prst="rect">
-            <a:avLst/>
-          </a:prstGeom>
-          <a:ln w="12700">
-            <a:miter lim="400000"/>
-          </a:ln>
-          <a:extLst>
-            <a:ext uri="{C572A759-6A51-4108-AA02-DFA0A04FC94B}">
-              <ma14:wrappingTextBoxFlag xmlns="" xmlns:m="http://schemas.openxmlformats.org/officeDocument/2006/math" xmlns:a14="http://schemas.microsoft.com/office/drawing/2010/main" xmlns:ma14="http://schemas.microsoft.com/office/mac/drawingml/2011/main" val="1"/>
-            </a:ext>
-          </a:extLst>
-        </p:spPr>
-        <p:txBody>
-          <a:bodyPr lIns="45719" rIns="45719">
-            <a:spAutoFit/>
-          </a:bodyPr>
-          <a:lstStyle>
-            <a:lvl1pPr>
-              <a:defRPr sz="2100">
-                <a:latin typeface="Arial"/>
-                <a:ea typeface="Arial"/>
-                <a:cs typeface="Arial"/>
-                <a:sym typeface="Arial"/>
-              </a:defRPr>
-            </a:lvl1pPr>
-          </a:lstStyle>
-          <a:p>
-            <a:r>
-              <a:t>Optional section descriptor in 21pt font</a:t>
-            </a:r>
-          </a:p>
-        </p:txBody>
-      </p:sp>
-      <p:sp>
-        <p:nvSpPr>
-          <p:cNvPr id="44" name="TextBox 53"/>
-          <p:cNvSpPr txBox="1"/>
-          <p:nvPr/>
-        </p:nvSpPr>
-        <p:spPr>
-          <a:xfrm>
-            <a:off x="22918782" y="12716374"/>
-            <a:ext cx="9039498" cy="1115546"/>
-          </a:xfrm>
-          <a:prstGeom prst="rect">
-            <a:avLst/>
-          </a:prstGeom>
-          <a:ln w="12700">
-            <a:miter lim="400000"/>
-          </a:ln>
-          <a:extLst>
-            <a:ext uri="{C572A759-6A51-4108-AA02-DFA0A04FC94B}">
-              <ma14:wrappingTextBoxFlag xmlns="" xmlns:m="http://schemas.openxmlformats.org/officeDocument/2006/math" xmlns:a14="http://schemas.microsoft.com/office/drawing/2010/main" xmlns:ma14="http://schemas.microsoft.com/office/mac/drawingml/2011/main" val="1"/>
-            </a:ext>
-          </a:extLst>
-        </p:spPr>
-        <p:txBody>
-          <a:bodyPr lIns="45719" rIns="45719">
-            <a:spAutoFit/>
-          </a:bodyPr>
-          <a:lstStyle>
-            <a:lvl1pPr>
-              <a:lnSpc>
-                <a:spcPct val="120000"/>
-              </a:lnSpc>
-              <a:defRPr sz="2100">
-                <a:solidFill>
-                  <a:srgbClr val="344854"/>
-                </a:solidFill>
-                <a:latin typeface="Arial"/>
-                <a:ea typeface="Arial"/>
-                <a:cs typeface="Arial"/>
-                <a:sym typeface="Arial"/>
-              </a:defRPr>
-            </a:lvl1pPr>
-          </a:lstStyle>
-          <a:p>
-            <a:r>
-              <a:t>This section is an example of a paragraph.  When creating sections, regardless of whether you're putting in text or images, always try to align to the edges of the yellow guidelines. </a:t>
-            </a:r>
-          </a:p>
-        </p:txBody>
-      </p:sp>
-      <p:sp>
-        <p:nvSpPr>
-          <p:cNvPr id="45" name="TextBox 54"/>
-          <p:cNvSpPr txBox="1"/>
-          <p:nvPr/>
-        </p:nvSpPr>
-        <p:spPr>
-          <a:xfrm>
-            <a:off x="22928580" y="10532596"/>
-            <a:ext cx="9029701" cy="276540"/>
-          </a:xfrm>
-          <a:prstGeom prst="rect">
-            <a:avLst/>
-          </a:prstGeom>
-          <a:ln w="12700">
-            <a:miter lim="400000"/>
-          </a:ln>
-          <a:extLst>
-            <a:ext uri="{C572A759-6A51-4108-AA02-DFA0A04FC94B}">
-              <ma14:wrappingTextBoxFlag xmlns="" xmlns:m="http://schemas.openxmlformats.org/officeDocument/2006/math" xmlns:a14="http://schemas.microsoft.com/office/drawing/2010/main" xmlns:ma14="http://schemas.microsoft.com/office/mac/drawingml/2011/main" val="1"/>
-            </a:ext>
-          </a:extLst>
-        </p:spPr>
-        <p:txBody>
-          <a:bodyPr lIns="45719" rIns="45719">
-            <a:spAutoFit/>
-          </a:bodyPr>
-          <a:lstStyle>
-            <a:lvl1pPr algn="ctr">
-              <a:defRPr sz="1300">
-                <a:solidFill>
-                  <a:srgbClr val="344854"/>
-                </a:solidFill>
-                <a:latin typeface="Arial"/>
-                <a:ea typeface="Arial"/>
-                <a:cs typeface="Arial"/>
-                <a:sym typeface="Arial"/>
-              </a:defRPr>
-            </a:lvl1pPr>
-          </a:lstStyle>
-          <a:p>
-            <a:r>
-              <a:t>Optional caption for images, charts, and graphs</a:t>
-            </a:r>
-          </a:p>
-        </p:txBody>
-      </p:sp>
-      <p:pic>
-        <p:nvPicPr>
-          <p:cNvPr id="47" name="Image" descr="Image"/>
-          <p:cNvPicPr>
-            <a:picLocks noChangeAspect="1"/>
-          </p:cNvPicPr>
-          <p:nvPr/>
-        </p:nvPicPr>
-        <p:blipFill>
-          <a:blip r:embed="rId4"/>
-          <a:stretch>
-            <a:fillRect/>
-          </a:stretch>
-        </p:blipFill>
-        <p:spPr>
-          <a:xfrm>
-            <a:off x="12541143" y="12968203"/>
-            <a:ext cx="7836114" cy="1910722"/>
-          </a:xfrm>
-          <a:prstGeom prst="rect">
-            <a:avLst/>
-          </a:prstGeom>
-          <a:ln w="12700">
-            <a:miter lim="400000"/>
-          </a:ln>
-        </p:spPr>
-      </p:pic>
-      <p:sp>
-        <p:nvSpPr>
-          <p:cNvPr id="48" name="TextBox 60"/>
-          <p:cNvSpPr txBox="1"/>
-          <p:nvPr/>
-        </p:nvSpPr>
-        <p:spPr>
-          <a:xfrm>
-            <a:off x="22905719" y="17368623"/>
-            <a:ext cx="6335025" cy="387516"/>
-          </a:xfrm>
-          <a:prstGeom prst="rect">
-            <a:avLst/>
-          </a:prstGeom>
-          <a:ln w="12700">
-            <a:miter lim="400000"/>
-          </a:ln>
-          <a:extLst>
-            <a:ext uri="{C572A759-6A51-4108-AA02-DFA0A04FC94B}">
-              <ma14:wrappingTextBoxFlag xmlns="" xmlns:m="http://schemas.openxmlformats.org/officeDocument/2006/math" xmlns:a14="http://schemas.microsoft.com/office/drawing/2010/main" xmlns:ma14="http://schemas.microsoft.com/office/mac/drawingml/2011/main" val="1"/>
-            </a:ext>
-          </a:extLst>
-        </p:spPr>
-        <p:txBody>
-          <a:bodyPr lIns="45719" rIns="45719">
-            <a:spAutoFit/>
-          </a:bodyPr>
-          <a:lstStyle>
-            <a:lvl1pPr>
-              <a:defRPr sz="2100">
-                <a:latin typeface="Arial"/>
-                <a:ea typeface="Arial"/>
-                <a:cs typeface="Arial"/>
-                <a:sym typeface="Arial"/>
-              </a:defRPr>
-            </a:lvl1pPr>
-          </a:lstStyle>
-          <a:p>
-            <a:r>
-              <a:t>References</a:t>
-            </a:r>
-          </a:p>
-        </p:txBody>
-      </p:sp>
-      <p:sp>
-        <p:nvSpPr>
-          <p:cNvPr id="49" name="TextBox 61"/>
-          <p:cNvSpPr txBox="1"/>
-          <p:nvPr/>
-        </p:nvSpPr>
-        <p:spPr>
-          <a:xfrm>
-            <a:off x="22905719" y="17994856"/>
-            <a:ext cx="6335025" cy="2535037"/>
-          </a:xfrm>
-          <a:prstGeom prst="rect">
-            <a:avLst/>
-          </a:prstGeom>
-          <a:ln w="12700">
-            <a:miter lim="400000"/>
-          </a:ln>
-          <a:extLst>
-            <a:ext uri="{C572A759-6A51-4108-AA02-DFA0A04FC94B}">
-              <ma14:wrappingTextBoxFlag xmlns="" xmlns:m="http://schemas.openxmlformats.org/officeDocument/2006/math" xmlns:a14="http://schemas.microsoft.com/office/drawing/2010/main" xmlns:ma14="http://schemas.microsoft.com/office/mac/drawingml/2011/main" val="1"/>
-            </a:ext>
-          </a:extLst>
-        </p:spPr>
-        <p:txBody>
-          <a:bodyPr lIns="45719" rIns="45719" anchor="b">
-            <a:spAutoFit/>
-          </a:bodyPr>
-          <a:lstStyle/>
-          <a:p>
-            <a:pPr>
-              <a:lnSpc>
-                <a:spcPct val="120000"/>
-              </a:lnSpc>
-              <a:spcBef>
-                <a:spcPts val="600"/>
-              </a:spcBef>
-              <a:defRPr sz="1400">
-                <a:latin typeface="Arial"/>
-                <a:ea typeface="Arial"/>
-                <a:cs typeface="Arial"/>
-                <a:sym typeface="Arial"/>
-              </a:defRPr>
-            </a:pPr>
-            <a:r>
-              <a:t>References in 14pt font </a:t>
-            </a:r>
-          </a:p>
-          <a:p>
-            <a:pPr>
-              <a:lnSpc>
-                <a:spcPct val="120000"/>
-              </a:lnSpc>
-              <a:spcBef>
-                <a:spcPts val="600"/>
-              </a:spcBef>
-              <a:defRPr sz="1400">
-                <a:latin typeface="Arial"/>
-                <a:ea typeface="Arial"/>
-                <a:cs typeface="Arial"/>
-                <a:sym typeface="Arial"/>
-              </a:defRPr>
-            </a:pPr>
-            <a:r>
-              <a:t>Homer W Simpson (2013). “Donuts taste good.” </a:t>
-            </a:r>
-            <a:r>
-              <a:rPr>
-                <a:solidFill>
-                  <a:srgbClr val="677B8C"/>
-                </a:solidFill>
-              </a:rPr>
-              <a:t>In: IEEE 13th Internation Conference on Data Mining. IEEE, pp. 405-409</a:t>
-            </a:r>
-          </a:p>
-          <a:p>
-            <a:pPr>
-              <a:lnSpc>
-                <a:spcPct val="120000"/>
-              </a:lnSpc>
-              <a:spcBef>
-                <a:spcPts val="600"/>
-              </a:spcBef>
-              <a:defRPr sz="1400">
-                <a:latin typeface="Arial"/>
-                <a:ea typeface="Arial"/>
-                <a:cs typeface="Arial"/>
-                <a:sym typeface="Arial"/>
-              </a:defRPr>
-            </a:pPr>
-            <a:r>
-              <a:t>Marge Simpson (2010). “Blue hair looks nice.”. </a:t>
-            </a:r>
-            <a:r>
-              <a:rPr>
-                <a:solidFill>
-                  <a:srgbClr val="677B8C"/>
-                </a:solidFill>
-              </a:rPr>
-              <a:t>In: Nature communications 1, p. 622.</a:t>
-            </a:r>
-          </a:p>
-          <a:p>
-            <a:pPr>
-              <a:lnSpc>
-                <a:spcPct val="120000"/>
-              </a:lnSpc>
-              <a:spcBef>
-                <a:spcPts val="600"/>
-              </a:spcBef>
-              <a:defRPr sz="1400">
-                <a:latin typeface="Arial"/>
-                <a:ea typeface="Arial"/>
-                <a:cs typeface="Arial"/>
-                <a:sym typeface="Arial"/>
-              </a:defRPr>
-            </a:pPr>
-            <a:r>
-              <a:t>Bart Simpson (2013). “Hello”. </a:t>
-            </a:r>
-            <a:r>
-              <a:rPr>
-                <a:solidFill>
-                  <a:srgbClr val="677B8C"/>
-                </a:solidFill>
-              </a:rPr>
-              <a:t>In: IEEE Simpsons.</a:t>
-            </a:r>
-          </a:p>
-          <a:p>
-            <a:pPr>
-              <a:lnSpc>
-                <a:spcPct val="120000"/>
-              </a:lnSpc>
-              <a:spcBef>
-                <a:spcPts val="600"/>
-              </a:spcBef>
-              <a:defRPr sz="1400">
-                <a:latin typeface="Arial"/>
-                <a:ea typeface="Arial"/>
-                <a:cs typeface="Arial"/>
-                <a:sym typeface="Arial"/>
-              </a:defRPr>
-            </a:pPr>
-            <a:r>
-              <a:t>Marge Simpson et al. (2013). “Lorem Ipsum.” </a:t>
-            </a:r>
-            <a:r>
-              <a:rPr>
-                <a:solidFill>
-                  <a:srgbClr val="677B8C"/>
-                </a:solidFill>
-              </a:rPr>
-              <a:t>In: Advances in Neural Information Processing Systems 26. Ed. by Christopher J. C. Burges et al., pp. 27–29.</a:t>
-            </a:r>
-          </a:p>
-        </p:txBody>
-      </p:sp>
-      <p:sp>
-        <p:nvSpPr>
           <p:cNvPr id="50" name="TextBox 37"/>
           <p:cNvSpPr txBox="1"/>
           <p:nvPr/>
@@ -2446,88 +2230,6 @@
           </a:p>
         </p:txBody>
       </p:sp>
-      <p:pic>
-        <p:nvPicPr>
-          <p:cNvPr id="51" name="Image" descr="Image"/>
-          <p:cNvPicPr>
-            <a:picLocks noChangeAspect="1"/>
-          </p:cNvPicPr>
-          <p:nvPr/>
-        </p:nvPicPr>
-        <p:blipFill>
-          <a:blip r:embed="rId5"/>
-          <a:srcRect l="11281" b="11572"/>
-          <a:stretch>
-            <a:fillRect/>
-          </a:stretch>
-        </p:blipFill>
-        <p:spPr>
-          <a:xfrm>
-            <a:off x="30639512" y="19418089"/>
-            <a:ext cx="2166058" cy="2158938"/>
-          </a:xfrm>
-          <a:prstGeom prst="rect">
-            <a:avLst/>
-          </a:prstGeom>
-          <a:ln w="12700">
-            <a:miter lim="400000"/>
-          </a:ln>
-        </p:spPr>
-      </p:pic>
-      <p:pic>
-        <p:nvPicPr>
-          <p:cNvPr id="52" name="Screen Shot 2020-10-26 at 10.02.03 PM.png" descr="Screen Shot 2020-10-26 at 10.02.03 PM.png"/>
-          <p:cNvPicPr>
-            <a:picLocks noChangeAspect="1"/>
-          </p:cNvPicPr>
-          <p:nvPr/>
-        </p:nvPicPr>
-        <p:blipFill>
-          <a:blip r:embed="rId6"/>
-          <a:stretch>
-            <a:fillRect/>
-          </a:stretch>
-        </p:blipFill>
-        <p:spPr>
-          <a:xfrm>
-            <a:off x="11923183" y="5243980"/>
-            <a:ext cx="9477674" cy="4380182"/>
-          </a:xfrm>
-          <a:prstGeom prst="rect">
-            <a:avLst/>
-          </a:prstGeom>
-          <a:ln w="12700">
-            <a:miter lim="400000"/>
-          </a:ln>
-        </p:spPr>
-      </p:pic>
-      <p:pic>
-        <p:nvPicPr>
-          <p:cNvPr id="53" name="Screen Shot 2020-10-26 at 10.03.39 PM.png" descr="Screen Shot 2020-10-26 at 10.03.39 PM.png"/>
-          <p:cNvPicPr>
-            <a:picLocks noChangeAspect="1"/>
-          </p:cNvPicPr>
-          <p:nvPr/>
-        </p:nvPicPr>
-        <p:blipFill>
-          <a:blip r:embed="rId7"/>
-          <a:stretch>
-            <a:fillRect/>
-          </a:stretch>
-        </p:blipFill>
-        <p:spPr>
-          <a:xfrm>
-            <a:off x="11422560" y="15186845"/>
-            <a:ext cx="10772753" cy="6030681"/>
-          </a:xfrm>
-          <a:prstGeom prst="rect">
-            <a:avLst/>
-          </a:prstGeom>
-          <a:ln w="12700">
-            <a:miter lim="400000"/>
-          </a:ln>
-        </p:spPr>
-      </p:pic>
       <p:sp>
         <p:nvSpPr>
           <p:cNvPr id="5" name="Rectangle 4">
@@ -2542,8 +2244,8 @@
         </p:nvSpPr>
         <p:spPr>
           <a:xfrm>
-            <a:off x="23810517" y="368573"/>
-            <a:ext cx="8833443" cy="2075200"/>
+            <a:off x="24033174" y="368573"/>
+            <a:ext cx="8610786" cy="1923988"/>
           </a:xfrm>
           <a:prstGeom prst="rect">
             <a:avLst/>
@@ -2619,7 +2321,7 @@
           <p:nvPr/>
         </p:nvPicPr>
         <p:blipFill>
-          <a:blip r:embed="rId8">
+          <a:blip r:embed="rId2">
             <a:extLst>
               <a:ext uri="{28A0092B-C50C-407E-A947-70E740481C1C}">
                 <a14:useLocalDpi xmlns:a14="http://schemas.microsoft.com/office/drawing/2010/main" val="0"/>
@@ -2632,8 +2334,8 @@
         </p:blipFill>
         <p:spPr>
           <a:xfrm>
-            <a:off x="23810518" y="341743"/>
-            <a:ext cx="8833442" cy="2128860"/>
+            <a:off x="24033174" y="341743"/>
+            <a:ext cx="8610786" cy="2075200"/>
           </a:xfrm>
           <a:prstGeom prst="rect">
             <a:avLst/>
@@ -2817,7 +2519,7 @@
         </p:nvSpPr>
         <p:spPr>
           <a:xfrm>
-            <a:off x="925287" y="12338080"/>
+            <a:off x="1138646" y="12338080"/>
             <a:ext cx="9064534" cy="615553"/>
           </a:xfrm>
           <a:prstGeom prst="rect">
@@ -2976,13 +2678,13 @@
           <p:nvPr/>
         </p:nvPicPr>
         <p:blipFill>
-          <a:blip r:embed="rId9"/>
+          <a:blip r:embed="rId3"/>
           <a:srcRect l="4149" t="2285" r="4550" b="7181"/>
           <a:stretch/>
         </p:blipFill>
         <p:spPr>
           <a:xfrm>
-            <a:off x="2888554" y="17356033"/>
+            <a:off x="1982834" y="17306706"/>
             <a:ext cx="6949440" cy="3173860"/>
           </a:xfrm>
           <a:prstGeom prst="rect">
@@ -2990,6 +2692,1092 @@
           </a:prstGeom>
         </p:spPr>
       </p:pic>
+      <p:pic>
+        <p:nvPicPr>
+          <p:cNvPr id="10" name="Picture 9" descr="A qr code on a white background&#10;&#10;AI-generated content may be incorrect.">
+            <a:extLst>
+              <a:ext uri="{FF2B5EF4-FFF2-40B4-BE49-F238E27FC236}">
+                <a16:creationId xmlns:a16="http://schemas.microsoft.com/office/drawing/2014/main" id="{CC044F1B-C1DB-4989-F7DF-0C0CC3462C9E}"/>
+              </a:ext>
+            </a:extLst>
+          </p:cNvPr>
+          <p:cNvPicPr>
+            <a:picLocks noChangeAspect="1"/>
+          </p:cNvPicPr>
+          <p:nvPr/>
+        </p:nvPicPr>
+        <p:blipFill>
+          <a:blip r:embed="rId4">
+            <a:extLst>
+              <a:ext uri="{28A0092B-C50C-407E-A947-70E740481C1C}">
+                <a14:useLocalDpi xmlns:a14="http://schemas.microsoft.com/office/drawing/2010/main" val="0"/>
+              </a:ext>
+            </a:extLst>
+          </a:blip>
+          <a:stretch>
+            <a:fillRect/>
+          </a:stretch>
+        </p:blipFill>
+        <p:spPr>
+          <a:xfrm>
+            <a:off x="30315120" y="18819764"/>
+            <a:ext cx="2063299" cy="2565369"/>
+          </a:xfrm>
+          <a:prstGeom prst="rect">
+            <a:avLst/>
+          </a:prstGeom>
+        </p:spPr>
+      </p:pic>
+      <p:sp>
+        <p:nvSpPr>
+          <p:cNvPr id="12" name="TextBox 11">
+            <a:extLst>
+              <a:ext uri="{FF2B5EF4-FFF2-40B4-BE49-F238E27FC236}">
+                <a16:creationId xmlns:a16="http://schemas.microsoft.com/office/drawing/2014/main" id="{9274D218-F250-80BA-F82C-9DFA58F58865}"/>
+              </a:ext>
+            </a:extLst>
+          </p:cNvPr>
+          <p:cNvSpPr txBox="1"/>
+          <p:nvPr/>
+        </p:nvSpPr>
+        <p:spPr>
+          <a:xfrm>
+            <a:off x="19819717" y="21584419"/>
+            <a:ext cx="12980724" cy="276999"/>
+          </a:xfrm>
+          <a:prstGeom prst="rect">
+            <a:avLst/>
+          </a:prstGeom>
+          <a:noFill/>
+          <a:ln w="12700" cap="flat">
+            <a:noFill/>
+            <a:miter lim="400000"/>
+          </a:ln>
+          <a:effectLst/>
+          <a:sp3d/>
+        </p:spPr>
+        <p:style>
+          <a:lnRef idx="0">
+            <a:scrgbClr r="0" g="0" b="0"/>
+          </a:lnRef>
+          <a:fillRef idx="0">
+            <a:scrgbClr r="0" g="0" b="0"/>
+          </a:fillRef>
+          <a:effectRef idx="0">
+            <a:scrgbClr r="0" g="0" b="0"/>
+          </a:effectRef>
+          <a:fontRef idx="none"/>
+        </p:style>
+        <p:txBody>
+          <a:bodyPr wrap="square">
+            <a:spAutoFit/>
+          </a:bodyPr>
+          <a:lstStyle/>
+          <a:p>
+            <a:r>
+              <a:rPr lang="en-US" dirty="0"/>
+              <a:t>https://view.officeapps.live.com/op/view.aspx?src=https%3A%2F%2Fraw.githubusercontent.com%2Fvalkov01%2FTreeVid%2Frefs%2Fheads%2Fmain%2FMidterm%2520Poster.pptx&amp;wdOrigin=BROWSELINK</a:t>
+            </a:r>
+          </a:p>
+        </p:txBody>
+      </p:sp>
+      <p:sp>
+        <p:nvSpPr>
+          <p:cNvPr id="14" name="TextBox 38">
+            <a:extLst>
+              <a:ext uri="{FF2B5EF4-FFF2-40B4-BE49-F238E27FC236}">
+                <a16:creationId xmlns:a16="http://schemas.microsoft.com/office/drawing/2014/main" id="{214C92B6-D62E-2A32-1A8A-8259B92B86FA}"/>
+              </a:ext>
+            </a:extLst>
+          </p:cNvPr>
+          <p:cNvSpPr txBox="1"/>
+          <p:nvPr/>
+        </p:nvSpPr>
+        <p:spPr>
+          <a:xfrm>
+            <a:off x="11926933" y="3581411"/>
+            <a:ext cx="9064534" cy="615553"/>
+          </a:xfrm>
+          <a:prstGeom prst="rect">
+            <a:avLst/>
+          </a:prstGeom>
+          <a:ln w="12700">
+            <a:miter lim="400000"/>
+          </a:ln>
+          <a:extLst>
+            <a:ext uri="{C572A759-6A51-4108-AA02-DFA0A04FC94B}">
+              <ma14:wrappingTextBoxFlag xmlns="" xmlns:m="http://schemas.openxmlformats.org/officeDocument/2006/math" xmlns:a14="http://schemas.microsoft.com/office/drawing/2010/main" xmlns:ma14="http://schemas.microsoft.com/office/mac/drawingml/2011/main" val="1"/>
+            </a:ext>
+          </a:extLst>
+        </p:spPr>
+        <p:txBody>
+          <a:bodyPr lIns="45719" rIns="45719">
+            <a:spAutoFit/>
+          </a:bodyPr>
+          <a:lstStyle>
+            <a:lvl1pPr>
+              <a:defRPr sz="3400">
+                <a:latin typeface="Arial"/>
+                <a:ea typeface="Arial"/>
+                <a:cs typeface="Arial"/>
+                <a:sym typeface="Arial"/>
+              </a:defRPr>
+            </a:lvl1pPr>
+          </a:lstStyle>
+          <a:p>
+            <a:pPr algn="ctr"/>
+            <a:r>
+              <a:rPr lang="en-GB" b="1" dirty="0">
+                <a:solidFill>
+                  <a:srgbClr val="6851EB"/>
+                </a:solidFill>
+              </a:rPr>
+              <a:t>DATA</a:t>
+            </a:r>
+            <a:endParaRPr b="1" dirty="0">
+              <a:solidFill>
+                <a:srgbClr val="6851EB"/>
+              </a:solidFill>
+            </a:endParaRPr>
+          </a:p>
+        </p:txBody>
+      </p:sp>
+      <p:sp>
+        <p:nvSpPr>
+          <p:cNvPr id="15" name="TextBox 39">
+            <a:extLst>
+              <a:ext uri="{FF2B5EF4-FFF2-40B4-BE49-F238E27FC236}">
+                <a16:creationId xmlns:a16="http://schemas.microsoft.com/office/drawing/2014/main" id="{99DC2732-2AF5-04A8-AED5-89FAEA8AFA4B}"/>
+              </a:ext>
+            </a:extLst>
+          </p:cNvPr>
+          <p:cNvSpPr txBox="1"/>
+          <p:nvPr/>
+        </p:nvSpPr>
+        <p:spPr>
+          <a:xfrm>
+            <a:off x="11926933" y="4475660"/>
+            <a:ext cx="9064534" cy="2383473"/>
+          </a:xfrm>
+          <a:prstGeom prst="rect">
+            <a:avLst/>
+          </a:prstGeom>
+          <a:ln w="12700">
+            <a:miter lim="400000"/>
+          </a:ln>
+          <a:extLst>
+            <a:ext uri="{C572A759-6A51-4108-AA02-DFA0A04FC94B}">
+              <ma14:wrappingTextBoxFlag xmlns="" xmlns:m="http://schemas.openxmlformats.org/officeDocument/2006/math" xmlns:a14="http://schemas.microsoft.com/office/drawing/2010/main" xmlns:ma14="http://schemas.microsoft.com/office/mac/drawingml/2011/main" val="1"/>
+            </a:ext>
+          </a:extLst>
+        </p:spPr>
+        <p:txBody>
+          <a:bodyPr lIns="45719" rIns="45719">
+            <a:spAutoFit/>
+          </a:bodyPr>
+          <a:lstStyle>
+            <a:lvl1pPr>
+              <a:lnSpc>
+                <a:spcPct val="120000"/>
+              </a:lnSpc>
+              <a:defRPr sz="2100">
+                <a:solidFill>
+                  <a:srgbClr val="344854"/>
+                </a:solidFill>
+                <a:latin typeface="Arial"/>
+                <a:ea typeface="Arial"/>
+                <a:cs typeface="Arial"/>
+                <a:sym typeface="Arial"/>
+              </a:defRPr>
+            </a:lvl1pPr>
+          </a:lstStyle>
+          <a:p>
+            <a:pPr algn="just"/>
+            <a:r>
+              <a:rPr lang="en-US" dirty="0"/>
+              <a:t>The dataset used in this project originates from a real-world case study provided by Dr. Andrew Hirons at Myerscough College, UK. </a:t>
+            </a:r>
+          </a:p>
+          <a:p>
+            <a:pPr algn="just"/>
+            <a:r>
+              <a:rPr lang="en-US" dirty="0"/>
+              <a:t>It contains over </a:t>
+            </a:r>
+            <a:r>
+              <a:rPr lang="en-US" b="1" dirty="0"/>
+              <a:t>5,200 RGB images </a:t>
+            </a:r>
+            <a:r>
+              <a:rPr lang="en-US" dirty="0"/>
+              <a:t>of </a:t>
+            </a:r>
+            <a:r>
+              <a:rPr lang="en-US" b="1" dirty="0"/>
+              <a:t>Acer and Liquidambar </a:t>
+            </a:r>
+            <a:r>
+              <a:rPr lang="en-US" dirty="0"/>
+              <a:t>trees, collected over a full seasonal cycle using a fixed on-site camera system. Each image is labeled with one of five phenological stages: </a:t>
+            </a:r>
+            <a:r>
+              <a:rPr lang="en-US" b="1" dirty="0"/>
+              <a:t>Dormancy, Leaf Flushing, Crown Development, Pruning Event, and Senescence</a:t>
+            </a:r>
+            <a:r>
+              <a:rPr lang="en-US" dirty="0"/>
+              <a:t>. </a:t>
+            </a:r>
+            <a:endParaRPr dirty="0"/>
+          </a:p>
+        </p:txBody>
+      </p:sp>
+      <p:pic>
+        <p:nvPicPr>
+          <p:cNvPr id="18" name="Picture 17">
+            <a:extLst>
+              <a:ext uri="{FF2B5EF4-FFF2-40B4-BE49-F238E27FC236}">
+                <a16:creationId xmlns:a16="http://schemas.microsoft.com/office/drawing/2014/main" id="{4892B5CC-72E4-63D2-508A-12F7E708E9A1}"/>
+              </a:ext>
+            </a:extLst>
+          </p:cNvPr>
+          <p:cNvPicPr>
+            <a:picLocks noChangeAspect="1"/>
+          </p:cNvPicPr>
+          <p:nvPr/>
+        </p:nvPicPr>
+        <p:blipFill>
+          <a:blip r:embed="rId5"/>
+          <a:stretch>
+            <a:fillRect/>
+          </a:stretch>
+        </p:blipFill>
+        <p:spPr>
+          <a:xfrm>
+            <a:off x="11903693" y="7157045"/>
+            <a:ext cx="9052941" cy="5897204"/>
+          </a:xfrm>
+          <a:prstGeom prst="rect">
+            <a:avLst/>
+          </a:prstGeom>
+        </p:spPr>
+      </p:pic>
+      <p:sp>
+        <p:nvSpPr>
+          <p:cNvPr id="19" name="TextBox 54">
+            <a:extLst>
+              <a:ext uri="{FF2B5EF4-FFF2-40B4-BE49-F238E27FC236}">
+                <a16:creationId xmlns:a16="http://schemas.microsoft.com/office/drawing/2014/main" id="{38BBFE08-5ECF-AD0B-0E03-A532BA3D18DC}"/>
+              </a:ext>
+            </a:extLst>
+          </p:cNvPr>
+          <p:cNvSpPr txBox="1"/>
+          <p:nvPr/>
+        </p:nvSpPr>
+        <p:spPr>
+          <a:xfrm>
+            <a:off x="11961766" y="13059773"/>
+            <a:ext cx="9029701" cy="292388"/>
+          </a:xfrm>
+          <a:prstGeom prst="rect">
+            <a:avLst/>
+          </a:prstGeom>
+          <a:ln w="12700">
+            <a:miter lim="400000"/>
+          </a:ln>
+          <a:extLst>
+            <a:ext uri="{C572A759-6A51-4108-AA02-DFA0A04FC94B}">
+              <ma14:wrappingTextBoxFlag xmlns="" xmlns:m="http://schemas.openxmlformats.org/officeDocument/2006/math" xmlns:a14="http://schemas.microsoft.com/office/drawing/2010/main" xmlns:ma14="http://schemas.microsoft.com/office/mac/drawingml/2011/main" val="1"/>
+            </a:ext>
+          </a:extLst>
+        </p:spPr>
+        <p:txBody>
+          <a:bodyPr lIns="45719" rIns="45719">
+            <a:spAutoFit/>
+          </a:bodyPr>
+          <a:lstStyle>
+            <a:lvl1pPr algn="ctr">
+              <a:defRPr sz="1300">
+                <a:solidFill>
+                  <a:srgbClr val="344854"/>
+                </a:solidFill>
+                <a:latin typeface="Arial"/>
+                <a:ea typeface="Arial"/>
+                <a:cs typeface="Arial"/>
+                <a:sym typeface="Arial"/>
+              </a:defRPr>
+            </a:lvl1pPr>
+          </a:lstStyle>
+          <a:p>
+            <a:r>
+              <a:rPr lang="en-US" dirty="0"/>
+              <a:t>Figure | Class distribution</a:t>
+            </a:r>
+            <a:endParaRPr dirty="0"/>
+          </a:p>
+        </p:txBody>
+      </p:sp>
+      <p:sp>
+        <p:nvSpPr>
+          <p:cNvPr id="20" name="TextBox 39">
+            <a:extLst>
+              <a:ext uri="{FF2B5EF4-FFF2-40B4-BE49-F238E27FC236}">
+                <a16:creationId xmlns:a16="http://schemas.microsoft.com/office/drawing/2014/main" id="{253F3187-A0B8-0ED4-4CA6-85A14A664292}"/>
+              </a:ext>
+            </a:extLst>
+          </p:cNvPr>
+          <p:cNvSpPr txBox="1"/>
+          <p:nvPr/>
+        </p:nvSpPr>
+        <p:spPr>
+          <a:xfrm>
+            <a:off x="11926933" y="13630857"/>
+            <a:ext cx="9064534" cy="2383473"/>
+          </a:xfrm>
+          <a:prstGeom prst="rect">
+            <a:avLst/>
+          </a:prstGeom>
+          <a:ln w="12700">
+            <a:miter lim="400000"/>
+          </a:ln>
+          <a:extLst>
+            <a:ext uri="{C572A759-6A51-4108-AA02-DFA0A04FC94B}">
+              <ma14:wrappingTextBoxFlag xmlns="" xmlns:m="http://schemas.openxmlformats.org/officeDocument/2006/math" xmlns:a14="http://schemas.microsoft.com/office/drawing/2010/main" xmlns:ma14="http://schemas.microsoft.com/office/mac/drawingml/2011/main" val="1"/>
+            </a:ext>
+          </a:extLst>
+        </p:spPr>
+        <p:txBody>
+          <a:bodyPr lIns="45719" rIns="45719">
+            <a:spAutoFit/>
+          </a:bodyPr>
+          <a:lstStyle>
+            <a:lvl1pPr>
+              <a:lnSpc>
+                <a:spcPct val="120000"/>
+              </a:lnSpc>
+              <a:defRPr sz="2100">
+                <a:solidFill>
+                  <a:srgbClr val="344854"/>
+                </a:solidFill>
+                <a:latin typeface="Arial"/>
+                <a:ea typeface="Arial"/>
+                <a:cs typeface="Arial"/>
+                <a:sym typeface="Arial"/>
+              </a:defRPr>
+            </a:lvl1pPr>
+          </a:lstStyle>
+          <a:p>
+            <a:pPr algn="just"/>
+            <a:r>
+              <a:rPr lang="en-US" dirty="0"/>
+              <a:t>In the original dataset, where some phenological stages represented less than 1% of the total samples. The task was scope down to: </a:t>
+            </a:r>
+            <a:r>
+              <a:rPr lang="en-US" b="1" dirty="0"/>
+              <a:t>Crown Development</a:t>
+            </a:r>
+            <a:r>
+              <a:rPr lang="en-US" dirty="0"/>
+              <a:t> (healthy) and </a:t>
+            </a:r>
+            <a:r>
+              <a:rPr lang="en-US" b="1" dirty="0"/>
+              <a:t>Senescence</a:t>
+            </a:r>
+            <a:r>
+              <a:rPr lang="en-US" dirty="0"/>
+              <a:t> (unhealthy). Only images of </a:t>
+            </a:r>
+            <a:r>
+              <a:rPr lang="en-US" b="1" dirty="0"/>
+              <a:t>Acer</a:t>
+            </a:r>
+            <a:r>
+              <a:rPr lang="en-US" dirty="0"/>
+              <a:t> trees were retained, as the Liquidambar samples contained too few instances of senescence and differed visually in structure and framing. </a:t>
+            </a:r>
+          </a:p>
+          <a:p>
+            <a:pPr algn="just"/>
+            <a:r>
+              <a:rPr lang="en-US" dirty="0"/>
+              <a:t>After filtering, a total of </a:t>
+            </a:r>
+            <a:r>
+              <a:rPr lang="en-US" b="1" dirty="0"/>
+              <a:t>1,667 images</a:t>
+            </a:r>
+            <a:r>
+              <a:rPr lang="en-US" dirty="0"/>
+              <a:t> remained. </a:t>
+            </a:r>
+            <a:endParaRPr dirty="0"/>
+          </a:p>
+        </p:txBody>
+      </p:sp>
+      <p:pic>
+        <p:nvPicPr>
+          <p:cNvPr id="22" name="Picture 21">
+            <a:extLst>
+              <a:ext uri="{FF2B5EF4-FFF2-40B4-BE49-F238E27FC236}">
+                <a16:creationId xmlns:a16="http://schemas.microsoft.com/office/drawing/2014/main" id="{CB6A163E-A7D2-6943-FB69-E1E2D3117855}"/>
+              </a:ext>
+            </a:extLst>
+          </p:cNvPr>
+          <p:cNvPicPr>
+            <a:picLocks noChangeAspect="1"/>
+          </p:cNvPicPr>
+          <p:nvPr/>
+        </p:nvPicPr>
+        <p:blipFill>
+          <a:blip r:embed="rId6"/>
+          <a:srcRect t="24097"/>
+          <a:stretch/>
+        </p:blipFill>
+        <p:spPr>
+          <a:xfrm>
+            <a:off x="13661337" y="16293026"/>
+            <a:ext cx="5595726" cy="4780767"/>
+          </a:xfrm>
+          <a:prstGeom prst="rect">
+            <a:avLst/>
+          </a:prstGeom>
+        </p:spPr>
+      </p:pic>
+      <p:sp>
+        <p:nvSpPr>
+          <p:cNvPr id="23" name="TextBox 38">
+            <a:extLst>
+              <a:ext uri="{FF2B5EF4-FFF2-40B4-BE49-F238E27FC236}">
+                <a16:creationId xmlns:a16="http://schemas.microsoft.com/office/drawing/2014/main" id="{C2EFE3FD-EB95-9A34-0AAD-5BB9C8B98E30}"/>
+              </a:ext>
+            </a:extLst>
+          </p:cNvPr>
+          <p:cNvSpPr txBox="1"/>
+          <p:nvPr/>
+        </p:nvSpPr>
+        <p:spPr>
+          <a:xfrm>
+            <a:off x="22867620" y="3581411"/>
+            <a:ext cx="9064534" cy="615553"/>
+          </a:xfrm>
+          <a:prstGeom prst="rect">
+            <a:avLst/>
+          </a:prstGeom>
+          <a:ln w="12700">
+            <a:miter lim="400000"/>
+          </a:ln>
+          <a:extLst>
+            <a:ext uri="{C572A759-6A51-4108-AA02-DFA0A04FC94B}">
+              <ma14:wrappingTextBoxFlag xmlns="" xmlns:m="http://schemas.openxmlformats.org/officeDocument/2006/math" xmlns:a14="http://schemas.microsoft.com/office/drawing/2010/main" xmlns:ma14="http://schemas.microsoft.com/office/mac/drawingml/2011/main" val="1"/>
+            </a:ext>
+          </a:extLst>
+        </p:spPr>
+        <p:txBody>
+          <a:bodyPr lIns="45719" rIns="45719">
+            <a:spAutoFit/>
+          </a:bodyPr>
+          <a:lstStyle>
+            <a:lvl1pPr>
+              <a:defRPr sz="3400">
+                <a:latin typeface="Arial"/>
+                <a:ea typeface="Arial"/>
+                <a:cs typeface="Arial"/>
+                <a:sym typeface="Arial"/>
+              </a:defRPr>
+            </a:lvl1pPr>
+          </a:lstStyle>
+          <a:p>
+            <a:pPr algn="ctr"/>
+            <a:r>
+              <a:rPr lang="en-GB" b="1" dirty="0">
+                <a:solidFill>
+                  <a:srgbClr val="6851EB"/>
+                </a:solidFill>
+              </a:rPr>
+              <a:t>MODELS</a:t>
+            </a:r>
+            <a:endParaRPr b="1" dirty="0">
+              <a:solidFill>
+                <a:srgbClr val="6851EB"/>
+              </a:solidFill>
+            </a:endParaRPr>
+          </a:p>
+        </p:txBody>
+      </p:sp>
+      <p:sp>
+        <p:nvSpPr>
+          <p:cNvPr id="26" name="TextBox 39">
+            <a:extLst>
+              <a:ext uri="{FF2B5EF4-FFF2-40B4-BE49-F238E27FC236}">
+                <a16:creationId xmlns:a16="http://schemas.microsoft.com/office/drawing/2014/main" id="{600FA42D-449D-A01C-CBBF-CE5E60742541}"/>
+              </a:ext>
+            </a:extLst>
+          </p:cNvPr>
+          <p:cNvSpPr txBox="1"/>
+          <p:nvPr/>
+        </p:nvSpPr>
+        <p:spPr>
+          <a:xfrm>
+            <a:off x="22867620" y="4476745"/>
+            <a:ext cx="9064534" cy="2262286"/>
+          </a:xfrm>
+          <a:prstGeom prst="rect">
+            <a:avLst/>
+          </a:prstGeom>
+          <a:ln w="12700">
+            <a:miter lim="400000"/>
+          </a:ln>
+          <a:extLst>
+            <a:ext uri="{C572A759-6A51-4108-AA02-DFA0A04FC94B}">
+              <ma14:wrappingTextBoxFlag xmlns="" xmlns:m="http://schemas.openxmlformats.org/officeDocument/2006/math" xmlns:a14="http://schemas.microsoft.com/office/drawing/2010/main" xmlns:ma14="http://schemas.microsoft.com/office/mac/drawingml/2011/main" val="1"/>
+            </a:ext>
+          </a:extLst>
+        </p:spPr>
+        <p:txBody>
+          <a:bodyPr lIns="45719" rIns="45719">
+            <a:spAutoFit/>
+          </a:bodyPr>
+          <a:lstStyle>
+            <a:lvl1pPr>
+              <a:lnSpc>
+                <a:spcPct val="120000"/>
+              </a:lnSpc>
+              <a:defRPr sz="2100">
+                <a:solidFill>
+                  <a:srgbClr val="344854"/>
+                </a:solidFill>
+                <a:latin typeface="Arial"/>
+                <a:ea typeface="Arial"/>
+                <a:cs typeface="Arial"/>
+                <a:sym typeface="Arial"/>
+              </a:defRPr>
+            </a:lvl1pPr>
+          </a:lstStyle>
+          <a:p>
+            <a:pPr algn="just"/>
+            <a:r>
+              <a:rPr lang="en-US" dirty="0"/>
+              <a:t>Following models were selected for this project due to their strong performance in imbalanced classification tasks. </a:t>
+            </a:r>
+          </a:p>
+          <a:p>
+            <a:pPr algn="just">
+              <a:lnSpc>
+                <a:spcPct val="150000"/>
+              </a:lnSpc>
+            </a:pPr>
+            <a:r>
+              <a:rPr lang="en-US" dirty="0"/>
+              <a:t>❖  EfficientNetV2 - high accuracy with efficient computation</a:t>
+            </a:r>
+          </a:p>
+          <a:p>
+            <a:pPr algn="just">
+              <a:lnSpc>
+                <a:spcPct val="150000"/>
+              </a:lnSpc>
+            </a:pPr>
+            <a:r>
+              <a:rPr lang="en-US" dirty="0"/>
+              <a:t>❖ Swin Transformer - strong global context modeling through attention mechanisms. </a:t>
+            </a:r>
+          </a:p>
+        </p:txBody>
+      </p:sp>
+      <p:sp>
+        <p:nvSpPr>
+          <p:cNvPr id="28" name="TextBox 54">
+            <a:extLst>
+              <a:ext uri="{FF2B5EF4-FFF2-40B4-BE49-F238E27FC236}">
+                <a16:creationId xmlns:a16="http://schemas.microsoft.com/office/drawing/2014/main" id="{F81A34E9-B890-D910-1D99-FACB9A93398C}"/>
+              </a:ext>
+            </a:extLst>
+          </p:cNvPr>
+          <p:cNvSpPr txBox="1"/>
+          <p:nvPr/>
+        </p:nvSpPr>
+        <p:spPr>
+          <a:xfrm>
+            <a:off x="11961766" y="21136829"/>
+            <a:ext cx="9029701" cy="292388"/>
+          </a:xfrm>
+          <a:prstGeom prst="rect">
+            <a:avLst/>
+          </a:prstGeom>
+          <a:ln w="12700">
+            <a:miter lim="400000"/>
+          </a:ln>
+          <a:extLst>
+            <a:ext uri="{C572A759-6A51-4108-AA02-DFA0A04FC94B}">
+              <ma14:wrappingTextBoxFlag xmlns="" xmlns:m="http://schemas.openxmlformats.org/officeDocument/2006/math" xmlns:a14="http://schemas.microsoft.com/office/drawing/2010/main" xmlns:ma14="http://schemas.microsoft.com/office/mac/drawingml/2011/main" val="1"/>
+            </a:ext>
+          </a:extLst>
+        </p:spPr>
+        <p:txBody>
+          <a:bodyPr lIns="45719" rIns="45719">
+            <a:spAutoFit/>
+          </a:bodyPr>
+          <a:lstStyle>
+            <a:lvl1pPr algn="ctr">
+              <a:defRPr sz="1300">
+                <a:solidFill>
+                  <a:srgbClr val="344854"/>
+                </a:solidFill>
+                <a:latin typeface="Arial"/>
+                <a:ea typeface="Arial"/>
+                <a:cs typeface="Arial"/>
+                <a:sym typeface="Arial"/>
+              </a:defRPr>
+            </a:lvl1pPr>
+          </a:lstStyle>
+          <a:p>
+            <a:r>
+              <a:rPr lang="en-US" dirty="0"/>
+              <a:t>Figure | Batch distribution</a:t>
+            </a:r>
+            <a:endParaRPr dirty="0"/>
+          </a:p>
+        </p:txBody>
+      </p:sp>
+      <p:pic>
+        <p:nvPicPr>
+          <p:cNvPr id="40" name="Picture 39">
+            <a:extLst>
+              <a:ext uri="{FF2B5EF4-FFF2-40B4-BE49-F238E27FC236}">
+                <a16:creationId xmlns:a16="http://schemas.microsoft.com/office/drawing/2014/main" id="{A232F2E5-A2A1-E725-05B9-A2A95ADAAFF7}"/>
+              </a:ext>
+            </a:extLst>
+          </p:cNvPr>
+          <p:cNvPicPr>
+            <a:picLocks noChangeAspect="1"/>
+          </p:cNvPicPr>
+          <p:nvPr/>
+        </p:nvPicPr>
+        <p:blipFill>
+          <a:blip r:embed="rId7"/>
+          <a:stretch>
+            <a:fillRect/>
+          </a:stretch>
+        </p:blipFill>
+        <p:spPr>
+          <a:xfrm>
+            <a:off x="22940172" y="7064795"/>
+            <a:ext cx="9052941" cy="4663201"/>
+          </a:xfrm>
+          <a:prstGeom prst="rect">
+            <a:avLst/>
+          </a:prstGeom>
+        </p:spPr>
+      </p:pic>
+      <p:sp>
+        <p:nvSpPr>
+          <p:cNvPr id="41" name="TextBox 54">
+            <a:extLst>
+              <a:ext uri="{FF2B5EF4-FFF2-40B4-BE49-F238E27FC236}">
+                <a16:creationId xmlns:a16="http://schemas.microsoft.com/office/drawing/2014/main" id="{ECDA0DFE-FEB1-9F96-611B-EB218EB00045}"/>
+              </a:ext>
+            </a:extLst>
+          </p:cNvPr>
+          <p:cNvSpPr txBox="1"/>
+          <p:nvPr/>
+        </p:nvSpPr>
+        <p:spPr>
+          <a:xfrm>
+            <a:off x="22885036" y="11956126"/>
+            <a:ext cx="9029701" cy="292388"/>
+          </a:xfrm>
+          <a:prstGeom prst="rect">
+            <a:avLst/>
+          </a:prstGeom>
+          <a:ln w="12700">
+            <a:miter lim="400000"/>
+          </a:ln>
+          <a:extLst>
+            <a:ext uri="{C572A759-6A51-4108-AA02-DFA0A04FC94B}">
+              <ma14:wrappingTextBoxFlag xmlns="" xmlns:m="http://schemas.openxmlformats.org/officeDocument/2006/math" xmlns:a14="http://schemas.microsoft.com/office/drawing/2010/main" xmlns:ma14="http://schemas.microsoft.com/office/mac/drawingml/2011/main" val="1"/>
+            </a:ext>
+          </a:extLst>
+        </p:spPr>
+        <p:txBody>
+          <a:bodyPr lIns="45719" rIns="45719">
+            <a:spAutoFit/>
+          </a:bodyPr>
+          <a:lstStyle>
+            <a:lvl1pPr algn="ctr">
+              <a:defRPr sz="1300">
+                <a:solidFill>
+                  <a:srgbClr val="344854"/>
+                </a:solidFill>
+                <a:latin typeface="Arial"/>
+                <a:ea typeface="Arial"/>
+                <a:cs typeface="Arial"/>
+                <a:sym typeface="Arial"/>
+              </a:defRPr>
+            </a:lvl1pPr>
+          </a:lstStyle>
+          <a:p>
+            <a:r>
+              <a:rPr lang="en-US" dirty="0"/>
+              <a:t>Table | Model’s Comparison</a:t>
+            </a:r>
+            <a:endParaRPr dirty="0"/>
+          </a:p>
+        </p:txBody>
+      </p:sp>
+      <p:sp>
+        <p:nvSpPr>
+          <p:cNvPr id="46" name="TextBox 38">
+            <a:extLst>
+              <a:ext uri="{FF2B5EF4-FFF2-40B4-BE49-F238E27FC236}">
+                <a16:creationId xmlns:a16="http://schemas.microsoft.com/office/drawing/2014/main" id="{B36E198C-4DCC-1D46-8341-9C922A2072FF}"/>
+              </a:ext>
+            </a:extLst>
+          </p:cNvPr>
+          <p:cNvSpPr txBox="1"/>
+          <p:nvPr/>
+        </p:nvSpPr>
+        <p:spPr>
+          <a:xfrm>
+            <a:off x="22885036" y="12878695"/>
+            <a:ext cx="9064534" cy="615553"/>
+          </a:xfrm>
+          <a:prstGeom prst="rect">
+            <a:avLst/>
+          </a:prstGeom>
+          <a:ln w="12700">
+            <a:miter lim="400000"/>
+          </a:ln>
+          <a:extLst>
+            <a:ext uri="{C572A759-6A51-4108-AA02-DFA0A04FC94B}">
+              <ma14:wrappingTextBoxFlag xmlns="" xmlns:m="http://schemas.openxmlformats.org/officeDocument/2006/math" xmlns:a14="http://schemas.microsoft.com/office/drawing/2010/main" xmlns:ma14="http://schemas.microsoft.com/office/mac/drawingml/2011/main" val="1"/>
+            </a:ext>
+          </a:extLst>
+        </p:spPr>
+        <p:txBody>
+          <a:bodyPr lIns="45719" rIns="45719">
+            <a:spAutoFit/>
+          </a:bodyPr>
+          <a:lstStyle>
+            <a:lvl1pPr>
+              <a:defRPr sz="3400">
+                <a:latin typeface="Arial"/>
+                <a:ea typeface="Arial"/>
+                <a:cs typeface="Arial"/>
+                <a:sym typeface="Arial"/>
+              </a:defRPr>
+            </a:lvl1pPr>
+          </a:lstStyle>
+          <a:p>
+            <a:pPr algn="ctr"/>
+            <a:r>
+              <a:rPr lang="en-GB" b="1" dirty="0">
+                <a:solidFill>
+                  <a:srgbClr val="6851EB"/>
+                </a:solidFill>
+              </a:rPr>
+              <a:t>NEXT STEPS</a:t>
+            </a:r>
+            <a:endParaRPr b="1" dirty="0">
+              <a:solidFill>
+                <a:srgbClr val="6851EB"/>
+              </a:solidFill>
+            </a:endParaRPr>
+          </a:p>
+        </p:txBody>
+      </p:sp>
+      <p:pic>
+        <p:nvPicPr>
+          <p:cNvPr id="55" name="Picture 54" descr="A purple and white logo&#10;&#10;AI-generated content may be incorrect.">
+            <a:extLst>
+              <a:ext uri="{FF2B5EF4-FFF2-40B4-BE49-F238E27FC236}">
+                <a16:creationId xmlns:a16="http://schemas.microsoft.com/office/drawing/2014/main" id="{26D05F86-6F83-14BC-503C-37659D204FC4}"/>
+              </a:ext>
+            </a:extLst>
+          </p:cNvPr>
+          <p:cNvPicPr>
+            <a:picLocks noChangeAspect="1"/>
+          </p:cNvPicPr>
+          <p:nvPr/>
+        </p:nvPicPr>
+        <p:blipFill>
+          <a:blip r:embed="rId8">
+            <a:extLst>
+              <a:ext uri="{28A0092B-C50C-407E-A947-70E740481C1C}">
+                <a14:useLocalDpi xmlns:a14="http://schemas.microsoft.com/office/drawing/2010/main" val="0"/>
+              </a:ext>
+            </a:extLst>
+          </a:blip>
+          <a:srcRect l="6890" t="12620" r="4458" b="12669"/>
+          <a:stretch/>
+        </p:blipFill>
+        <p:spPr>
+          <a:xfrm>
+            <a:off x="23051321" y="13882640"/>
+            <a:ext cx="1131029" cy="953176"/>
+          </a:xfrm>
+          <a:prstGeom prst="rect">
+            <a:avLst/>
+          </a:prstGeom>
+        </p:spPr>
+      </p:pic>
+      <p:sp>
+        <p:nvSpPr>
+          <p:cNvPr id="56" name="TextBox 39">
+            <a:extLst>
+              <a:ext uri="{FF2B5EF4-FFF2-40B4-BE49-F238E27FC236}">
+                <a16:creationId xmlns:a16="http://schemas.microsoft.com/office/drawing/2014/main" id="{142349D3-B9F4-7985-DB2C-B40B39522241}"/>
+              </a:ext>
+            </a:extLst>
+          </p:cNvPr>
+          <p:cNvSpPr txBox="1"/>
+          <p:nvPr/>
+        </p:nvSpPr>
+        <p:spPr>
+          <a:xfrm>
+            <a:off x="24481801" y="13943404"/>
+            <a:ext cx="6796389" cy="832279"/>
+          </a:xfrm>
+          <a:prstGeom prst="rect">
+            <a:avLst/>
+          </a:prstGeom>
+          <a:ln w="12700">
+            <a:miter lim="400000"/>
+          </a:ln>
+          <a:extLst>
+            <a:ext uri="{C572A759-6A51-4108-AA02-DFA0A04FC94B}">
+              <ma14:wrappingTextBoxFlag xmlns="" xmlns:m="http://schemas.openxmlformats.org/officeDocument/2006/math" xmlns:a14="http://schemas.microsoft.com/office/drawing/2010/main" xmlns:ma14="http://schemas.microsoft.com/office/mac/drawingml/2011/main" val="1"/>
+            </a:ext>
+          </a:extLst>
+        </p:spPr>
+        <p:txBody>
+          <a:bodyPr wrap="square" lIns="45719" rIns="45719">
+            <a:spAutoFit/>
+          </a:bodyPr>
+          <a:lstStyle>
+            <a:lvl1pPr>
+              <a:lnSpc>
+                <a:spcPct val="120000"/>
+              </a:lnSpc>
+              <a:defRPr sz="2100">
+                <a:solidFill>
+                  <a:srgbClr val="344854"/>
+                </a:solidFill>
+                <a:latin typeface="Arial"/>
+                <a:ea typeface="Arial"/>
+                <a:cs typeface="Arial"/>
+                <a:sym typeface="Arial"/>
+              </a:defRPr>
+            </a:lvl1pPr>
+          </a:lstStyle>
+          <a:p>
+            <a:pPr algn="just"/>
+            <a:r>
+              <a:rPr lang="en-US" dirty="0"/>
+              <a:t>Models Training on the dataset using consistent experimental settings.</a:t>
+            </a:r>
+            <a:endParaRPr dirty="0"/>
+          </a:p>
+        </p:txBody>
+      </p:sp>
+      <p:pic>
+        <p:nvPicPr>
+          <p:cNvPr id="58" name="Picture 57" descr="A purple line with letters and numbers&#10;&#10;AI-generated content may be incorrect.">
+            <a:extLst>
+              <a:ext uri="{FF2B5EF4-FFF2-40B4-BE49-F238E27FC236}">
+                <a16:creationId xmlns:a16="http://schemas.microsoft.com/office/drawing/2014/main" id="{C93FF166-A822-5D86-FD0B-049B468A0FF4}"/>
+              </a:ext>
+            </a:extLst>
+          </p:cNvPr>
+          <p:cNvPicPr>
+            <a:picLocks noChangeAspect="1"/>
+          </p:cNvPicPr>
+          <p:nvPr/>
+        </p:nvPicPr>
+        <p:blipFill>
+          <a:blip r:embed="rId9">
+            <a:extLst>
+              <a:ext uri="{28A0092B-C50C-407E-A947-70E740481C1C}">
+                <a14:useLocalDpi xmlns:a14="http://schemas.microsoft.com/office/drawing/2010/main" val="0"/>
+              </a:ext>
+            </a:extLst>
+          </a:blip>
+          <a:stretch>
+            <a:fillRect/>
+          </a:stretch>
+        </p:blipFill>
+        <p:spPr>
+          <a:xfrm>
+            <a:off x="23051322" y="15430866"/>
+            <a:ext cx="1131028" cy="1131028"/>
+          </a:xfrm>
+          <a:prstGeom prst="rect">
+            <a:avLst/>
+          </a:prstGeom>
+        </p:spPr>
+      </p:pic>
+      <p:sp>
+        <p:nvSpPr>
+          <p:cNvPr id="59" name="TextBox 39">
+            <a:extLst>
+              <a:ext uri="{FF2B5EF4-FFF2-40B4-BE49-F238E27FC236}">
+                <a16:creationId xmlns:a16="http://schemas.microsoft.com/office/drawing/2014/main" id="{763FF30B-E924-0DC6-2D87-B86CF27FFC86}"/>
+              </a:ext>
+            </a:extLst>
+          </p:cNvPr>
+          <p:cNvSpPr txBox="1"/>
+          <p:nvPr/>
+        </p:nvSpPr>
+        <p:spPr>
+          <a:xfrm>
+            <a:off x="24481800" y="15574262"/>
+            <a:ext cx="6796389" cy="832279"/>
+          </a:xfrm>
+          <a:prstGeom prst="rect">
+            <a:avLst/>
+          </a:prstGeom>
+          <a:ln w="12700">
+            <a:miter lim="400000"/>
+          </a:ln>
+          <a:extLst>
+            <a:ext uri="{C572A759-6A51-4108-AA02-DFA0A04FC94B}">
+              <ma14:wrappingTextBoxFlag xmlns="" xmlns:m="http://schemas.openxmlformats.org/officeDocument/2006/math" xmlns:a14="http://schemas.microsoft.com/office/drawing/2010/main" xmlns:ma14="http://schemas.microsoft.com/office/mac/drawingml/2011/main" val="1"/>
+            </a:ext>
+          </a:extLst>
+        </p:spPr>
+        <p:txBody>
+          <a:bodyPr wrap="square" lIns="45719" rIns="45719">
+            <a:spAutoFit/>
+          </a:bodyPr>
+          <a:lstStyle>
+            <a:lvl1pPr>
+              <a:lnSpc>
+                <a:spcPct val="120000"/>
+              </a:lnSpc>
+              <a:defRPr sz="2100">
+                <a:solidFill>
+                  <a:srgbClr val="344854"/>
+                </a:solidFill>
+                <a:latin typeface="Arial"/>
+                <a:ea typeface="Arial"/>
+                <a:cs typeface="Arial"/>
+                <a:sym typeface="Arial"/>
+              </a:defRPr>
+            </a:lvl1pPr>
+          </a:lstStyle>
+          <a:p>
+            <a:pPr algn="just"/>
+            <a:r>
+              <a:rPr lang="en-US" dirty="0"/>
+              <a:t>Compare the results based primarily on </a:t>
+            </a:r>
+            <a:r>
+              <a:rPr lang="en-US" b="1" dirty="0"/>
+              <a:t>recall</a:t>
+            </a:r>
+            <a:r>
+              <a:rPr lang="en-US" dirty="0"/>
+              <a:t>, to assess their ability to correctly detect unhealthy trees.</a:t>
+            </a:r>
+            <a:endParaRPr dirty="0"/>
+          </a:p>
+        </p:txBody>
+      </p:sp>
+      <p:pic>
+        <p:nvPicPr>
+          <p:cNvPr id="61" name="Picture 60" descr="A blue and purple line drawing of a graph&#10;&#10;AI-generated content may be incorrect.">
+            <a:extLst>
+              <a:ext uri="{FF2B5EF4-FFF2-40B4-BE49-F238E27FC236}">
+                <a16:creationId xmlns:a16="http://schemas.microsoft.com/office/drawing/2014/main" id="{0E1B1BC3-A607-E363-55AA-3CBD875F9334}"/>
+              </a:ext>
+            </a:extLst>
+          </p:cNvPr>
+          <p:cNvPicPr>
+            <a:picLocks noChangeAspect="1"/>
+          </p:cNvPicPr>
+          <p:nvPr/>
+        </p:nvPicPr>
+        <p:blipFill>
+          <a:blip r:embed="rId10">
+            <a:extLst>
+              <a:ext uri="{28A0092B-C50C-407E-A947-70E740481C1C}">
+                <a14:useLocalDpi xmlns:a14="http://schemas.microsoft.com/office/drawing/2010/main" val="0"/>
+              </a:ext>
+            </a:extLst>
+          </a:blip>
+          <a:stretch>
+            <a:fillRect/>
+          </a:stretch>
+        </p:blipFill>
+        <p:spPr>
+          <a:xfrm>
+            <a:off x="23051321" y="17020000"/>
+            <a:ext cx="1131028" cy="1131028"/>
+          </a:xfrm>
+          <a:prstGeom prst="rect">
+            <a:avLst/>
+          </a:prstGeom>
+        </p:spPr>
+      </p:pic>
+      <p:sp>
+        <p:nvSpPr>
+          <p:cNvPr id="62" name="TextBox 39">
+            <a:extLst>
+              <a:ext uri="{FF2B5EF4-FFF2-40B4-BE49-F238E27FC236}">
+                <a16:creationId xmlns:a16="http://schemas.microsoft.com/office/drawing/2014/main" id="{12348A5F-7C97-89B0-9764-CBBCDF92DC26}"/>
+              </a:ext>
+            </a:extLst>
+          </p:cNvPr>
+          <p:cNvSpPr txBox="1"/>
+          <p:nvPr/>
+        </p:nvSpPr>
+        <p:spPr>
+          <a:xfrm>
+            <a:off x="24481801" y="17155411"/>
+            <a:ext cx="6796388" cy="832279"/>
+          </a:xfrm>
+          <a:prstGeom prst="rect">
+            <a:avLst/>
+          </a:prstGeom>
+          <a:ln w="12700">
+            <a:miter lim="400000"/>
+          </a:ln>
+          <a:extLst>
+            <a:ext uri="{C572A759-6A51-4108-AA02-DFA0A04FC94B}">
+              <ma14:wrappingTextBoxFlag xmlns="" xmlns:m="http://schemas.openxmlformats.org/officeDocument/2006/math" xmlns:a14="http://schemas.microsoft.com/office/drawing/2010/main" xmlns:ma14="http://schemas.microsoft.com/office/mac/drawingml/2011/main" val="1"/>
+            </a:ext>
+          </a:extLst>
+        </p:spPr>
+        <p:txBody>
+          <a:bodyPr wrap="square" lIns="45719" rIns="45719">
+            <a:spAutoFit/>
+          </a:bodyPr>
+          <a:lstStyle>
+            <a:lvl1pPr>
+              <a:lnSpc>
+                <a:spcPct val="120000"/>
+              </a:lnSpc>
+              <a:defRPr sz="2100">
+                <a:solidFill>
+                  <a:srgbClr val="344854"/>
+                </a:solidFill>
+                <a:latin typeface="Arial"/>
+                <a:ea typeface="Arial"/>
+                <a:cs typeface="Arial"/>
+                <a:sym typeface="Arial"/>
+              </a:defRPr>
+            </a:lvl1pPr>
+          </a:lstStyle>
+          <a:p>
+            <a:pPr algn="just"/>
+            <a:r>
+              <a:rPr lang="en-US" dirty="0"/>
+              <a:t>Design and implement a user-friendly dashboard to visualize tree health predictions, including class outputs.</a:t>
+            </a:r>
+            <a:endParaRPr dirty="0"/>
+          </a:p>
+        </p:txBody>
+      </p:sp>
     </p:spTree>
   </p:cSld>
   <p:clrMapOvr>
